--- a/showcases/sales_insights/assets/sales_insight_case_study_anonymized.pptx
+++ b/showcases/sales_insights/assets/sales_insight_case_study_anonymized.pptx
@@ -1348,6 +1348,13 @@
         </dgm:presLayoutVars>
       </dgm:prSet>
       <dgm:spPr/>
+      <dgm:t>
+        <a:bodyPr/>
+        <a:lstStyle/>
+        <a:p>
+          <a:endParaRPr lang="de-DE"/>
+        </a:p>
+      </dgm:t>
     </dgm:pt>
     <dgm:pt modelId="{BDE2A17B-5694-474E-B022-C248A15D680C}" type="pres">
       <dgm:prSet presAssocID="{0CC3DB7C-2842-4F75-B8D2-BAB97C0F8BB1}" presName="dummyMaxCanvas" presStyleCnt="0">
@@ -1437,6 +1444,13 @@
         </dgm:presLayoutVars>
       </dgm:prSet>
       <dgm:spPr/>
+      <dgm:t>
+        <a:bodyPr/>
+        <a:lstStyle/>
+        <a:p>
+          <a:endParaRPr lang="de-DE"/>
+        </a:p>
+      </dgm:t>
     </dgm:pt>
     <dgm:pt modelId="{9682221F-3597-4AE7-9D64-77D2E777905C}" type="pres">
       <dgm:prSet presAssocID="{0CC3DB7C-2842-4F75-B8D2-BAB97C0F8BB1}" presName="FiveConn_2-3" presStyleLbl="fgAccFollowNode1" presStyleIdx="1" presStyleCnt="4">
@@ -1445,6 +1459,13 @@
         </dgm:presLayoutVars>
       </dgm:prSet>
       <dgm:spPr/>
+      <dgm:t>
+        <a:bodyPr/>
+        <a:lstStyle/>
+        <a:p>
+          <a:endParaRPr lang="de-DE"/>
+        </a:p>
+      </dgm:t>
     </dgm:pt>
     <dgm:pt modelId="{6AD1DC67-102E-4FF4-BA43-211771B145F3}" type="pres">
       <dgm:prSet presAssocID="{0CC3DB7C-2842-4F75-B8D2-BAB97C0F8BB1}" presName="FiveConn_3-4" presStyleLbl="fgAccFollowNode1" presStyleIdx="2" presStyleCnt="4">
@@ -1453,6 +1474,13 @@
         </dgm:presLayoutVars>
       </dgm:prSet>
       <dgm:spPr/>
+      <dgm:t>
+        <a:bodyPr/>
+        <a:lstStyle/>
+        <a:p>
+          <a:endParaRPr lang="de-DE"/>
+        </a:p>
+      </dgm:t>
     </dgm:pt>
     <dgm:pt modelId="{7ECA0758-B9E9-4541-983D-810E73EB8097}" type="pres">
       <dgm:prSet presAssocID="{0CC3DB7C-2842-4F75-B8D2-BAB97C0F8BB1}" presName="FiveConn_4-5" presStyleLbl="fgAccFollowNode1" presStyleIdx="3" presStyleCnt="4">
@@ -1461,6 +1489,13 @@
         </dgm:presLayoutVars>
       </dgm:prSet>
       <dgm:spPr/>
+      <dgm:t>
+        <a:bodyPr/>
+        <a:lstStyle/>
+        <a:p>
+          <a:endParaRPr lang="de-DE"/>
+        </a:p>
+      </dgm:t>
     </dgm:pt>
     <dgm:pt modelId="{32AA7D69-2EA6-4707-8AE8-5C06CEEE0D3B}" type="pres">
       <dgm:prSet presAssocID="{0CC3DB7C-2842-4F75-B8D2-BAB97C0F8BB1}" presName="FiveNodes_1_text" presStyleLbl="node1" presStyleIdx="4" presStyleCnt="5">
@@ -1539,26 +1574,26 @@
     </dgm:pt>
   </dgm:ptLst>
   <dgm:cxnLst>
+    <dgm:cxn modelId="{BE5A0B1A-3AAA-4B7B-8F7E-DAE567C57412}" srcId="{0CC3DB7C-2842-4F75-B8D2-BAB97C0F8BB1}" destId="{91A95779-9829-4F1F-8010-A54C6306B1E0}" srcOrd="3" destOrd="0" parTransId="{687A06B4-4218-4474-904B-1C873591C32A}" sibTransId="{83C10710-44AF-40BA-96CB-CD6D4C4A94AF}"/>
+    <dgm:cxn modelId="{1651E9FC-5FEB-4AC7-8905-AEBF2D9E4FC7}" type="presOf" srcId="{91A95779-9829-4F1F-8010-A54C6306B1E0}" destId="{4085B8DA-AC4B-4BAA-B516-47185C53F3AF}" srcOrd="0" destOrd="0" presId="urn:microsoft.com/office/officeart/2005/8/layout/vProcess5"/>
+    <dgm:cxn modelId="{9CC00C5B-7AA8-4403-8B6A-D47988422CA9}" srcId="{0CC3DB7C-2842-4F75-B8D2-BAB97C0F8BB1}" destId="{8DB1A06C-8C55-443A-AF5E-212E591AE492}" srcOrd="1" destOrd="0" parTransId="{C5560865-084E-4ED2-988B-32935EF1CDF0}" sibTransId="{22197A0E-1B67-4A06-BA4F-1DCE604D9EBF}"/>
+    <dgm:cxn modelId="{20DBDB94-C8F0-409F-B973-1B03A6A1CFFC}" type="presOf" srcId="{382DFD82-DACA-472F-9F0D-5871C62502EB}" destId="{509D35C1-385D-489C-B05D-02E015133E5C}" srcOrd="0" destOrd="0" presId="urn:microsoft.com/office/officeart/2005/8/layout/vProcess5"/>
+    <dgm:cxn modelId="{014ADB2B-E899-4D9C-BC14-B044D477839E}" type="presOf" srcId="{22197A0E-1B67-4A06-BA4F-1DCE604D9EBF}" destId="{9682221F-3597-4AE7-9D64-77D2E777905C}" srcOrd="0" destOrd="0" presId="urn:microsoft.com/office/officeart/2005/8/layout/vProcess5"/>
+    <dgm:cxn modelId="{23C469C7-65F4-4D6D-9CD7-22DDEE084410}" type="presOf" srcId="{71A1C759-B31B-40F0-8742-B6AAF8DD7AE5}" destId="{2CEF5EA1-6464-4838-B00C-80B2240B52B9}" srcOrd="1" destOrd="0" presId="urn:microsoft.com/office/officeart/2005/8/layout/vProcess5"/>
+    <dgm:cxn modelId="{B3BE4018-A83E-4E20-8947-2CC6CE4A9461}" srcId="{0CC3DB7C-2842-4F75-B8D2-BAB97C0F8BB1}" destId="{71A1C759-B31B-40F0-8742-B6AAF8DD7AE5}" srcOrd="2" destOrd="0" parTransId="{66680288-CB41-4C6D-B902-8F0FA7AD1985}" sibTransId="{0135D20F-E23D-45C7-BE23-4BA2279BBD7A}"/>
+    <dgm:cxn modelId="{0DAEB9EF-8D83-47A0-A78B-E38C105301D7}" type="presOf" srcId="{4A566352-60D6-4F95-866D-5248176EC7A1}" destId="{318C6FA7-B69C-41CC-BE18-7D9F7C8FC4AD}" srcOrd="0" destOrd="0" presId="urn:microsoft.com/office/officeart/2005/8/layout/vProcess5"/>
+    <dgm:cxn modelId="{1C2599EA-7623-487A-9700-D1C0A3FCC36B}" type="presOf" srcId="{9BB80551-9B6A-4E10-AB79-CE9E6AA21664}" destId="{F074093D-D63B-4255-9CF5-897A4601419F}" srcOrd="0" destOrd="0" presId="urn:microsoft.com/office/officeart/2005/8/layout/vProcess5"/>
+    <dgm:cxn modelId="{E1E11DBA-E500-498D-99FA-7C9DB80BBAA8}" type="presOf" srcId="{8DB1A06C-8C55-443A-AF5E-212E591AE492}" destId="{12A58DE3-F4EC-4A4C-8119-750DF164D9EE}" srcOrd="0" destOrd="0" presId="urn:microsoft.com/office/officeart/2005/8/layout/vProcess5"/>
+    <dgm:cxn modelId="{B79F8E5C-F5C8-4720-83BF-E111CE96152C}" srcId="{0CC3DB7C-2842-4F75-B8D2-BAB97C0F8BB1}" destId="{382DFD82-DACA-472F-9F0D-5871C62502EB}" srcOrd="4" destOrd="0" parTransId="{65379FD6-B55E-4754-90DF-A515F53F735B}" sibTransId="{FC508AED-5650-40EB-B14B-568E36F4888E}"/>
+    <dgm:cxn modelId="{8773B843-2FE7-49E0-AF05-5790993B0104}" type="presOf" srcId="{9BB80551-9B6A-4E10-AB79-CE9E6AA21664}" destId="{32AA7D69-2EA6-4707-8AE8-5C06CEEE0D3B}" srcOrd="1" destOrd="0" presId="urn:microsoft.com/office/officeart/2005/8/layout/vProcess5"/>
+    <dgm:cxn modelId="{0DFECEB4-1403-4BA5-8548-75B75143D64A}" type="presOf" srcId="{83C10710-44AF-40BA-96CB-CD6D4C4A94AF}" destId="{7ECA0758-B9E9-4541-983D-810E73EB8097}" srcOrd="0" destOrd="0" presId="urn:microsoft.com/office/officeart/2005/8/layout/vProcess5"/>
+    <dgm:cxn modelId="{D7A122BB-5FD9-4107-9D5A-BA883BCD3362}" type="presOf" srcId="{8DB1A06C-8C55-443A-AF5E-212E591AE492}" destId="{8B536BEE-D1F7-4050-B3CC-08A5D3871181}" srcOrd="1" destOrd="0" presId="urn:microsoft.com/office/officeart/2005/8/layout/vProcess5"/>
+    <dgm:cxn modelId="{1785D36E-6198-46AA-90BF-4B92A7E21506}" type="presOf" srcId="{382DFD82-DACA-472F-9F0D-5871C62502EB}" destId="{2B25EEC3-A295-4136-8607-43309429CB63}" srcOrd="1" destOrd="0" presId="urn:microsoft.com/office/officeart/2005/8/layout/vProcess5"/>
+    <dgm:cxn modelId="{8C4B6D0F-693F-443D-B653-5DB20F0615AE}" type="presOf" srcId="{71A1C759-B31B-40F0-8742-B6AAF8DD7AE5}" destId="{9979438E-A643-48D9-BD6B-F714BE9ED51F}" srcOrd="0" destOrd="0" presId="urn:microsoft.com/office/officeart/2005/8/layout/vProcess5"/>
     <dgm:cxn modelId="{3A6077EE-C170-4CBC-97FD-2B556398AFE0}" type="presOf" srcId="{91A95779-9829-4F1F-8010-A54C6306B1E0}" destId="{01BCCE5B-4CFF-4C4B-8AF8-C24197D9591B}" srcOrd="1" destOrd="0" presId="urn:microsoft.com/office/officeart/2005/8/layout/vProcess5"/>
-    <dgm:cxn modelId="{D7A122BB-5FD9-4107-9D5A-BA883BCD3362}" type="presOf" srcId="{8DB1A06C-8C55-443A-AF5E-212E591AE492}" destId="{8B536BEE-D1F7-4050-B3CC-08A5D3871181}" srcOrd="1" destOrd="0" presId="urn:microsoft.com/office/officeart/2005/8/layout/vProcess5"/>
     <dgm:cxn modelId="{C3B95B74-F1B4-42B6-8CFE-4A2B97EE27A1}" srcId="{0CC3DB7C-2842-4F75-B8D2-BAB97C0F8BB1}" destId="{9BB80551-9B6A-4E10-AB79-CE9E6AA21664}" srcOrd="0" destOrd="0" parTransId="{C3BFA930-63F3-495A-B2D4-43CBEA6A6F53}" sibTransId="{4A566352-60D6-4F95-866D-5248176EC7A1}"/>
-    <dgm:cxn modelId="{014ADB2B-E899-4D9C-BC14-B044D477839E}" type="presOf" srcId="{22197A0E-1B67-4A06-BA4F-1DCE604D9EBF}" destId="{9682221F-3597-4AE7-9D64-77D2E777905C}" srcOrd="0" destOrd="0" presId="urn:microsoft.com/office/officeart/2005/8/layout/vProcess5"/>
-    <dgm:cxn modelId="{0DFECEB4-1403-4BA5-8548-75B75143D64A}" type="presOf" srcId="{83C10710-44AF-40BA-96CB-CD6D4C4A94AF}" destId="{7ECA0758-B9E9-4541-983D-810E73EB8097}" srcOrd="0" destOrd="0" presId="urn:microsoft.com/office/officeart/2005/8/layout/vProcess5"/>
-    <dgm:cxn modelId="{B3BE4018-A83E-4E20-8947-2CC6CE4A9461}" srcId="{0CC3DB7C-2842-4F75-B8D2-BAB97C0F8BB1}" destId="{71A1C759-B31B-40F0-8742-B6AAF8DD7AE5}" srcOrd="2" destOrd="0" parTransId="{66680288-CB41-4C6D-B902-8F0FA7AD1985}" sibTransId="{0135D20F-E23D-45C7-BE23-4BA2279BBD7A}"/>
-    <dgm:cxn modelId="{23C469C7-65F4-4D6D-9CD7-22DDEE084410}" type="presOf" srcId="{71A1C759-B31B-40F0-8742-B6AAF8DD7AE5}" destId="{2CEF5EA1-6464-4838-B00C-80B2240B52B9}" srcOrd="1" destOrd="0" presId="urn:microsoft.com/office/officeart/2005/8/layout/vProcess5"/>
+    <dgm:cxn modelId="{DA572A38-163E-4E72-B6E5-84597A4CC9B6}" type="presOf" srcId="{0CC3DB7C-2842-4F75-B8D2-BAB97C0F8BB1}" destId="{D5146BBF-D24D-46FF-9898-A11FF87C778F}" srcOrd="0" destOrd="0" presId="urn:microsoft.com/office/officeart/2005/8/layout/vProcess5"/>
     <dgm:cxn modelId="{98964E9F-A87D-482C-995B-F0C4045C99C8}" type="presOf" srcId="{0135D20F-E23D-45C7-BE23-4BA2279BBD7A}" destId="{6AD1DC67-102E-4FF4-BA43-211771B145F3}" srcOrd="0" destOrd="0" presId="urn:microsoft.com/office/officeart/2005/8/layout/vProcess5"/>
-    <dgm:cxn modelId="{8C4B6D0F-693F-443D-B653-5DB20F0615AE}" type="presOf" srcId="{71A1C759-B31B-40F0-8742-B6AAF8DD7AE5}" destId="{9979438E-A643-48D9-BD6B-F714BE9ED51F}" srcOrd="0" destOrd="0" presId="urn:microsoft.com/office/officeart/2005/8/layout/vProcess5"/>
-    <dgm:cxn modelId="{0DAEB9EF-8D83-47A0-A78B-E38C105301D7}" type="presOf" srcId="{4A566352-60D6-4F95-866D-5248176EC7A1}" destId="{318C6FA7-B69C-41CC-BE18-7D9F7C8FC4AD}" srcOrd="0" destOrd="0" presId="urn:microsoft.com/office/officeart/2005/8/layout/vProcess5"/>
-    <dgm:cxn modelId="{B79F8E5C-F5C8-4720-83BF-E111CE96152C}" srcId="{0CC3DB7C-2842-4F75-B8D2-BAB97C0F8BB1}" destId="{382DFD82-DACA-472F-9F0D-5871C62502EB}" srcOrd="4" destOrd="0" parTransId="{65379FD6-B55E-4754-90DF-A515F53F735B}" sibTransId="{FC508AED-5650-40EB-B14B-568E36F4888E}"/>
-    <dgm:cxn modelId="{1651E9FC-5FEB-4AC7-8905-AEBF2D9E4FC7}" type="presOf" srcId="{91A95779-9829-4F1F-8010-A54C6306B1E0}" destId="{4085B8DA-AC4B-4BAA-B516-47185C53F3AF}" srcOrd="0" destOrd="0" presId="urn:microsoft.com/office/officeart/2005/8/layout/vProcess5"/>
-    <dgm:cxn modelId="{BE5A0B1A-3AAA-4B7B-8F7E-DAE567C57412}" srcId="{0CC3DB7C-2842-4F75-B8D2-BAB97C0F8BB1}" destId="{91A95779-9829-4F1F-8010-A54C6306B1E0}" srcOrd="3" destOrd="0" parTransId="{687A06B4-4218-4474-904B-1C873591C32A}" sibTransId="{83C10710-44AF-40BA-96CB-CD6D4C4A94AF}"/>
-    <dgm:cxn modelId="{20DBDB94-C8F0-409F-B973-1B03A6A1CFFC}" type="presOf" srcId="{382DFD82-DACA-472F-9F0D-5871C62502EB}" destId="{509D35C1-385D-489C-B05D-02E015133E5C}" srcOrd="0" destOrd="0" presId="urn:microsoft.com/office/officeart/2005/8/layout/vProcess5"/>
-    <dgm:cxn modelId="{E1E11DBA-E500-498D-99FA-7C9DB80BBAA8}" type="presOf" srcId="{8DB1A06C-8C55-443A-AF5E-212E591AE492}" destId="{12A58DE3-F4EC-4A4C-8119-750DF164D9EE}" srcOrd="0" destOrd="0" presId="urn:microsoft.com/office/officeart/2005/8/layout/vProcess5"/>
-    <dgm:cxn modelId="{8773B843-2FE7-49E0-AF05-5790993B0104}" type="presOf" srcId="{9BB80551-9B6A-4E10-AB79-CE9E6AA21664}" destId="{32AA7D69-2EA6-4707-8AE8-5C06CEEE0D3B}" srcOrd="1" destOrd="0" presId="urn:microsoft.com/office/officeart/2005/8/layout/vProcess5"/>
-    <dgm:cxn modelId="{DA572A38-163E-4E72-B6E5-84597A4CC9B6}" type="presOf" srcId="{0CC3DB7C-2842-4F75-B8D2-BAB97C0F8BB1}" destId="{D5146BBF-D24D-46FF-9898-A11FF87C778F}" srcOrd="0" destOrd="0" presId="urn:microsoft.com/office/officeart/2005/8/layout/vProcess5"/>
-    <dgm:cxn modelId="{9CC00C5B-7AA8-4403-8B6A-D47988422CA9}" srcId="{0CC3DB7C-2842-4F75-B8D2-BAB97C0F8BB1}" destId="{8DB1A06C-8C55-443A-AF5E-212E591AE492}" srcOrd="1" destOrd="0" parTransId="{C5560865-084E-4ED2-988B-32935EF1CDF0}" sibTransId="{22197A0E-1B67-4A06-BA4F-1DCE604D9EBF}"/>
-    <dgm:cxn modelId="{1785D36E-6198-46AA-90BF-4B92A7E21506}" type="presOf" srcId="{382DFD82-DACA-472F-9F0D-5871C62502EB}" destId="{2B25EEC3-A295-4136-8607-43309429CB63}" srcOrd="1" destOrd="0" presId="urn:microsoft.com/office/officeart/2005/8/layout/vProcess5"/>
-    <dgm:cxn modelId="{1C2599EA-7623-487A-9700-D1C0A3FCC36B}" type="presOf" srcId="{9BB80551-9B6A-4E10-AB79-CE9E6AA21664}" destId="{F074093D-D63B-4255-9CF5-897A4601419F}" srcOrd="0" destOrd="0" presId="urn:microsoft.com/office/officeart/2005/8/layout/vProcess5"/>
     <dgm:cxn modelId="{7DC563B1-C853-447F-BF3D-7A1268BE53AA}" type="presParOf" srcId="{D5146BBF-D24D-46FF-9898-A11FF87C778F}" destId="{BDE2A17B-5694-474E-B022-C248A15D680C}" srcOrd="0" destOrd="0" presId="urn:microsoft.com/office/officeart/2005/8/layout/vProcess5"/>
     <dgm:cxn modelId="{D21DB9C1-69DF-47DC-9B6C-A69EF6181F68}" type="presParOf" srcId="{D5146BBF-D24D-46FF-9898-A11FF87C778F}" destId="{F074093D-D63B-4255-9CF5-897A4601419F}" srcOrd="1" destOrd="0" presId="urn:microsoft.com/office/officeart/2005/8/layout/vProcess5"/>
     <dgm:cxn modelId="{8680021E-23EB-423F-9779-DF75760FEDF6}" type="presParOf" srcId="{D5146BBF-D24D-46FF-9898-A11FF87C778F}" destId="{12A58DE3-F4EC-4A4C-8119-750DF164D9EE}" srcOrd="2" destOrd="0" presId="urn:microsoft.com/office/officeart/2005/8/layout/vProcess5"/>
@@ -4781,7 +4816,7 @@
           <a:p>
             <a:fld id="{410F4966-F5B6-451E-B71C-7B85870CEA9E}" type="datetimeFigureOut">
               <a:rPr lang="de-DE" smtClean="0"/>
-              <a:t>11.07.2025</a:t>
+              <a:t>11.08.2025</a:t>
             </a:fld>
             <a:endParaRPr lang="de-DE" dirty="0"/>
           </a:p>
@@ -5215,29 +5250,6 @@
       </p:sp>
       <p:sp>
         <p:nvSpPr>
-          <p:cNvPr id="4" name="Date Placeholder 3"/>
-          <p:cNvSpPr>
-            <a:spLocks noGrp="1"/>
-          </p:cNvSpPr>
-          <p:nvPr>
-            <p:ph type="dt" sz="half" idx="10"/>
-          </p:nvPr>
-        </p:nvSpPr>
-        <p:spPr/>
-        <p:txBody>
-          <a:bodyPr/>
-          <a:lstStyle/>
-          <a:p>
-            <a:r>
-              <a:rPr lang="en-US" smtClean="0"/>
-              <a:t>7/11/2025</a:t>
-            </a:r>
-            <a:endParaRPr lang="en-US" dirty="0"/>
-          </a:p>
-        </p:txBody>
-      </p:sp>
-      <p:sp>
-        <p:nvSpPr>
           <p:cNvPr id="5" name="Footer Placeholder 4"/>
           <p:cNvSpPr>
             <a:spLocks noGrp="1"/>
@@ -5253,7 +5265,11 @@
           <a:p>
             <a:r>
               <a:rPr lang="en-US" dirty="0" smtClean="0"/>
-              <a:t>Case Study - Jana Bettzüge</a:t>
+              <a:t>Case </a:t>
+            </a:r>
+            <a:r>
+              <a:rPr lang="en-US" dirty="0" smtClean="0"/>
+              <a:t>Study</a:t>
             </a:r>
             <a:endParaRPr lang="en-US" dirty="0"/>
           </a:p>
@@ -5286,364 +5302,6 @@
     <p:extLst>
       <p:ext uri="{BB962C8B-B14F-4D97-AF65-F5344CB8AC3E}">
         <p14:creationId xmlns:p14="http://schemas.microsoft.com/office/powerpoint/2010/main" val="3168075583"/>
-      </p:ext>
-    </p:extLst>
-  </p:cSld>
-  <p:clrMapOvr>
-    <a:masterClrMapping/>
-  </p:clrMapOvr>
-</p:sldLayout>
-</file>
-
-<file path=ppt/slideLayouts/slideLayout10.xml><?xml version="1.0" encoding="utf-8"?>
-<p:sldLayout xmlns:a="http://schemas.openxmlformats.org/drawingml/2006/main" xmlns:r="http://schemas.openxmlformats.org/officeDocument/2006/relationships" xmlns:p="http://schemas.openxmlformats.org/presentationml/2006/main" type="vertTx" preserve="1">
-  <p:cSld name="Title and Vertical Text">
-    <p:spTree>
-      <p:nvGrpSpPr>
-        <p:cNvPr id="1" name=""/>
-        <p:cNvGrpSpPr/>
-        <p:nvPr/>
-      </p:nvGrpSpPr>
-      <p:grpSpPr>
-        <a:xfrm>
-          <a:off x="0" y="0"/>
-          <a:ext cx="0" cy="0"/>
-          <a:chOff x="0" y="0"/>
-          <a:chExt cx="0" cy="0"/>
-        </a:xfrm>
-      </p:grpSpPr>
-      <p:sp>
-        <p:nvSpPr>
-          <p:cNvPr id="2" name="Title 1"/>
-          <p:cNvSpPr>
-            <a:spLocks noGrp="1"/>
-          </p:cNvSpPr>
-          <p:nvPr>
-            <p:ph type="title"/>
-          </p:nvPr>
-        </p:nvSpPr>
-        <p:spPr/>
-        <p:txBody>
-          <a:bodyPr/>
-          <a:lstStyle/>
-          <a:p>
-            <a:r>
-              <a:rPr lang="en-US" smtClean="0"/>
-              <a:t>Click to edit Master title style</a:t>
-            </a:r>
-            <a:endParaRPr lang="en-US"/>
-          </a:p>
-        </p:txBody>
-      </p:sp>
-      <p:sp>
-        <p:nvSpPr>
-          <p:cNvPr id="3" name="Vertical Text Placeholder 2"/>
-          <p:cNvSpPr>
-            <a:spLocks noGrp="1"/>
-          </p:cNvSpPr>
-          <p:nvPr>
-            <p:ph type="body" orient="vert" idx="1"/>
-          </p:nvPr>
-        </p:nvSpPr>
-        <p:spPr/>
-        <p:txBody>
-          <a:bodyPr vert="eaVert"/>
-          <a:lstStyle/>
-          <a:p>
-            <a:pPr lvl="0"/>
-            <a:r>
-              <a:rPr lang="en-US" smtClean="0"/>
-              <a:t>Click to edit Master text styles</a:t>
-            </a:r>
-          </a:p>
-          <a:p>
-            <a:pPr lvl="1"/>
-            <a:r>
-              <a:rPr lang="en-US" smtClean="0"/>
-              <a:t>Second level</a:t>
-            </a:r>
-          </a:p>
-          <a:p>
-            <a:pPr lvl="2"/>
-            <a:r>
-              <a:rPr lang="en-US" smtClean="0"/>
-              <a:t>Third level</a:t>
-            </a:r>
-          </a:p>
-          <a:p>
-            <a:pPr lvl="3"/>
-            <a:r>
-              <a:rPr lang="en-US" smtClean="0"/>
-              <a:t>Fourth level</a:t>
-            </a:r>
-          </a:p>
-          <a:p>
-            <a:pPr lvl="4"/>
-            <a:r>
-              <a:rPr lang="en-US" smtClean="0"/>
-              <a:t>Fifth level</a:t>
-            </a:r>
-            <a:endParaRPr lang="en-US"/>
-          </a:p>
-        </p:txBody>
-      </p:sp>
-      <p:sp>
-        <p:nvSpPr>
-          <p:cNvPr id="4" name="Date Placeholder 3"/>
-          <p:cNvSpPr>
-            <a:spLocks noGrp="1"/>
-          </p:cNvSpPr>
-          <p:nvPr>
-            <p:ph type="dt" sz="half" idx="10"/>
-          </p:nvPr>
-        </p:nvSpPr>
-        <p:spPr/>
-        <p:txBody>
-          <a:bodyPr/>
-          <a:lstStyle/>
-          <a:p>
-            <a:r>
-              <a:rPr lang="en-US" smtClean="0"/>
-              <a:t>7/11/2025</a:t>
-            </a:r>
-            <a:endParaRPr lang="en-US" dirty="0"/>
-          </a:p>
-        </p:txBody>
-      </p:sp>
-      <p:sp>
-        <p:nvSpPr>
-          <p:cNvPr id="5" name="Footer Placeholder 4"/>
-          <p:cNvSpPr>
-            <a:spLocks noGrp="1"/>
-          </p:cNvSpPr>
-          <p:nvPr>
-            <p:ph type="ftr" sz="quarter" idx="11"/>
-          </p:nvPr>
-        </p:nvSpPr>
-        <p:spPr/>
-        <p:txBody>
-          <a:bodyPr/>
-          <a:lstStyle/>
-          <a:p>
-            <a:r>
-              <a:rPr lang="en-US" dirty="0" smtClean="0"/>
-              <a:t>Case Study - Jana Bettzüge</a:t>
-            </a:r>
-            <a:endParaRPr lang="en-US" dirty="0"/>
-          </a:p>
-        </p:txBody>
-      </p:sp>
-      <p:sp>
-        <p:nvSpPr>
-          <p:cNvPr id="6" name="Slide Number Placeholder 5"/>
-          <p:cNvSpPr>
-            <a:spLocks noGrp="1"/>
-          </p:cNvSpPr>
-          <p:nvPr>
-            <p:ph type="sldNum" sz="quarter" idx="12"/>
-          </p:nvPr>
-        </p:nvSpPr>
-        <p:spPr/>
-        <p:txBody>
-          <a:bodyPr/>
-          <a:lstStyle/>
-          <a:p>
-            <a:fld id="{C1FF6DA9-008F-8B48-92A6-B652298478BF}" type="slidenum">
-              <a:rPr lang="en-US" smtClean="0"/>
-              <a:t>‹Nr.›</a:t>
-            </a:fld>
-            <a:endParaRPr lang="en-US" dirty="0"/>
-          </a:p>
-        </p:txBody>
-      </p:sp>
-    </p:spTree>
-    <p:extLst>
-      <p:ext uri="{BB962C8B-B14F-4D97-AF65-F5344CB8AC3E}">
-        <p14:creationId xmlns:p14="http://schemas.microsoft.com/office/powerpoint/2010/main" val="2910927964"/>
-      </p:ext>
-    </p:extLst>
-  </p:cSld>
-  <p:clrMapOvr>
-    <a:masterClrMapping/>
-  </p:clrMapOvr>
-</p:sldLayout>
-</file>
-
-<file path=ppt/slideLayouts/slideLayout11.xml><?xml version="1.0" encoding="utf-8"?>
-<p:sldLayout xmlns:a="http://schemas.openxmlformats.org/drawingml/2006/main" xmlns:r="http://schemas.openxmlformats.org/officeDocument/2006/relationships" xmlns:p="http://schemas.openxmlformats.org/presentationml/2006/main" type="vertTitleAndTx" preserve="1">
-  <p:cSld name="Vertical Title and Text">
-    <p:spTree>
-      <p:nvGrpSpPr>
-        <p:cNvPr id="1" name=""/>
-        <p:cNvGrpSpPr/>
-        <p:nvPr/>
-      </p:nvGrpSpPr>
-      <p:grpSpPr>
-        <a:xfrm>
-          <a:off x="0" y="0"/>
-          <a:ext cx="0" cy="0"/>
-          <a:chOff x="0" y="0"/>
-          <a:chExt cx="0" cy="0"/>
-        </a:xfrm>
-      </p:grpSpPr>
-      <p:sp>
-        <p:nvSpPr>
-          <p:cNvPr id="2" name="Vertical Title 1"/>
-          <p:cNvSpPr>
-            <a:spLocks noGrp="1"/>
-          </p:cNvSpPr>
-          <p:nvPr>
-            <p:ph type="title" orient="vert"/>
-          </p:nvPr>
-        </p:nvSpPr>
-        <p:spPr>
-          <a:xfrm>
-            <a:off x="8839200" y="274639"/>
-            <a:ext cx="2743200" cy="5851525"/>
-          </a:xfrm>
-        </p:spPr>
-        <p:txBody>
-          <a:bodyPr vert="eaVert"/>
-          <a:lstStyle/>
-          <a:p>
-            <a:r>
-              <a:rPr lang="en-US" smtClean="0"/>
-              <a:t>Click to edit Master title style</a:t>
-            </a:r>
-            <a:endParaRPr lang="en-US"/>
-          </a:p>
-        </p:txBody>
-      </p:sp>
-      <p:sp>
-        <p:nvSpPr>
-          <p:cNvPr id="3" name="Vertical Text Placeholder 2"/>
-          <p:cNvSpPr>
-            <a:spLocks noGrp="1"/>
-          </p:cNvSpPr>
-          <p:nvPr>
-            <p:ph type="body" orient="vert" idx="1"/>
-          </p:nvPr>
-        </p:nvSpPr>
-        <p:spPr>
-          <a:xfrm>
-            <a:off x="609600" y="274639"/>
-            <a:ext cx="8026400" cy="5851525"/>
-          </a:xfrm>
-        </p:spPr>
-        <p:txBody>
-          <a:bodyPr vert="eaVert"/>
-          <a:lstStyle/>
-          <a:p>
-            <a:pPr lvl="0"/>
-            <a:r>
-              <a:rPr lang="en-US" smtClean="0"/>
-              <a:t>Click to edit Master text styles</a:t>
-            </a:r>
-          </a:p>
-          <a:p>
-            <a:pPr lvl="1"/>
-            <a:r>
-              <a:rPr lang="en-US" smtClean="0"/>
-              <a:t>Second level</a:t>
-            </a:r>
-          </a:p>
-          <a:p>
-            <a:pPr lvl="2"/>
-            <a:r>
-              <a:rPr lang="en-US" smtClean="0"/>
-              <a:t>Third level</a:t>
-            </a:r>
-          </a:p>
-          <a:p>
-            <a:pPr lvl="3"/>
-            <a:r>
-              <a:rPr lang="en-US" smtClean="0"/>
-              <a:t>Fourth level</a:t>
-            </a:r>
-          </a:p>
-          <a:p>
-            <a:pPr lvl="4"/>
-            <a:r>
-              <a:rPr lang="en-US" smtClean="0"/>
-              <a:t>Fifth level</a:t>
-            </a:r>
-            <a:endParaRPr lang="en-US"/>
-          </a:p>
-        </p:txBody>
-      </p:sp>
-      <p:sp>
-        <p:nvSpPr>
-          <p:cNvPr id="4" name="Date Placeholder 3"/>
-          <p:cNvSpPr>
-            <a:spLocks noGrp="1"/>
-          </p:cNvSpPr>
-          <p:nvPr>
-            <p:ph type="dt" sz="half" idx="10"/>
-          </p:nvPr>
-        </p:nvSpPr>
-        <p:spPr/>
-        <p:txBody>
-          <a:bodyPr/>
-          <a:lstStyle/>
-          <a:p>
-            <a:r>
-              <a:rPr lang="en-US" smtClean="0"/>
-              <a:t>7/11/2025</a:t>
-            </a:r>
-            <a:endParaRPr lang="en-US" dirty="0"/>
-          </a:p>
-        </p:txBody>
-      </p:sp>
-      <p:sp>
-        <p:nvSpPr>
-          <p:cNvPr id="5" name="Footer Placeholder 4"/>
-          <p:cNvSpPr>
-            <a:spLocks noGrp="1"/>
-          </p:cNvSpPr>
-          <p:nvPr>
-            <p:ph type="ftr" sz="quarter" idx="11"/>
-          </p:nvPr>
-        </p:nvSpPr>
-        <p:spPr/>
-        <p:txBody>
-          <a:bodyPr/>
-          <a:lstStyle/>
-          <a:p>
-            <a:r>
-              <a:rPr lang="en-US" dirty="0" smtClean="0"/>
-              <a:t>Case Study - Jana Bettzüge</a:t>
-            </a:r>
-            <a:endParaRPr lang="en-US" dirty="0"/>
-          </a:p>
-        </p:txBody>
-      </p:sp>
-      <p:sp>
-        <p:nvSpPr>
-          <p:cNvPr id="6" name="Slide Number Placeholder 5"/>
-          <p:cNvSpPr>
-            <a:spLocks noGrp="1"/>
-          </p:cNvSpPr>
-          <p:nvPr>
-            <p:ph type="sldNum" sz="quarter" idx="12"/>
-          </p:nvPr>
-        </p:nvSpPr>
-        <p:spPr/>
-        <p:txBody>
-          <a:bodyPr/>
-          <a:lstStyle/>
-          <a:p>
-            <a:fld id="{C1FF6DA9-008F-8B48-92A6-B652298478BF}" type="slidenum">
-              <a:rPr lang="en-US" smtClean="0"/>
-              <a:t>‹Nr.›</a:t>
-            </a:fld>
-            <a:endParaRPr lang="en-US" dirty="0"/>
-          </a:p>
-        </p:txBody>
-      </p:sp>
-    </p:spTree>
-    <p:extLst>
-      <p:ext uri="{BB962C8B-B14F-4D97-AF65-F5344CB8AC3E}">
-        <p14:creationId xmlns:p14="http://schemas.microsoft.com/office/powerpoint/2010/main" val="3612223792"/>
       </p:ext>
     </p:extLst>
   </p:cSld>
@@ -5752,29 +5410,6 @@
       </p:sp>
       <p:sp>
         <p:nvSpPr>
-          <p:cNvPr id="4" name="Date Placeholder 3"/>
-          <p:cNvSpPr>
-            <a:spLocks noGrp="1"/>
-          </p:cNvSpPr>
-          <p:nvPr>
-            <p:ph type="dt" sz="half" idx="10"/>
-          </p:nvPr>
-        </p:nvSpPr>
-        <p:spPr/>
-        <p:txBody>
-          <a:bodyPr/>
-          <a:lstStyle/>
-          <a:p>
-            <a:r>
-              <a:rPr lang="en-US" smtClean="0"/>
-              <a:t>7/11/2025</a:t>
-            </a:r>
-            <a:endParaRPr lang="en-US" dirty="0"/>
-          </a:p>
-        </p:txBody>
-      </p:sp>
-      <p:sp>
-        <p:nvSpPr>
           <p:cNvPr id="5" name="Footer Placeholder 4"/>
           <p:cNvSpPr>
             <a:spLocks noGrp="1"/>
@@ -5790,7 +5425,11 @@
           <a:p>
             <a:r>
               <a:rPr lang="en-US" dirty="0" smtClean="0"/>
-              <a:t>Case Study - Jana Bettzüge</a:t>
+              <a:t>Case </a:t>
+            </a:r>
+            <a:r>
+              <a:rPr lang="en-US" dirty="0" smtClean="0"/>
+              <a:t>Study</a:t>
             </a:r>
             <a:endParaRPr lang="en-US" dirty="0"/>
           </a:p>
@@ -6036,29 +5675,6 @@
       </p:sp>
       <p:sp>
         <p:nvSpPr>
-          <p:cNvPr id="4" name="Date Placeholder 3"/>
-          <p:cNvSpPr>
-            <a:spLocks noGrp="1"/>
-          </p:cNvSpPr>
-          <p:nvPr>
-            <p:ph type="dt" sz="half" idx="10"/>
-          </p:nvPr>
-        </p:nvSpPr>
-        <p:spPr/>
-        <p:txBody>
-          <a:bodyPr/>
-          <a:lstStyle/>
-          <a:p>
-            <a:r>
-              <a:rPr lang="en-US" smtClean="0"/>
-              <a:t>7/11/2025</a:t>
-            </a:r>
-            <a:endParaRPr lang="en-US" dirty="0"/>
-          </a:p>
-        </p:txBody>
-      </p:sp>
-      <p:sp>
-        <p:nvSpPr>
           <p:cNvPr id="5" name="Footer Placeholder 4"/>
           <p:cNvSpPr>
             <a:spLocks noGrp="1"/>
@@ -6074,7 +5690,11 @@
           <a:p>
             <a:r>
               <a:rPr lang="en-US" dirty="0" smtClean="0"/>
-              <a:t>Case Study - Jana Bettzüge</a:t>
+              <a:t>Case </a:t>
+            </a:r>
+            <a:r>
+              <a:rPr lang="en-US" dirty="0" smtClean="0"/>
+              <a:t>Study</a:t>
             </a:r>
             <a:endParaRPr lang="en-US" dirty="0"/>
           </a:p>
@@ -6328,29 +5948,6 @@
       </p:sp>
       <p:sp>
         <p:nvSpPr>
-          <p:cNvPr id="5" name="Date Placeholder 4"/>
-          <p:cNvSpPr>
-            <a:spLocks noGrp="1"/>
-          </p:cNvSpPr>
-          <p:nvPr>
-            <p:ph type="dt" sz="half" idx="10"/>
-          </p:nvPr>
-        </p:nvSpPr>
-        <p:spPr/>
-        <p:txBody>
-          <a:bodyPr/>
-          <a:lstStyle/>
-          <a:p>
-            <a:r>
-              <a:rPr lang="en-US" smtClean="0"/>
-              <a:t>7/11/2025</a:t>
-            </a:r>
-            <a:endParaRPr lang="en-US" dirty="0"/>
-          </a:p>
-        </p:txBody>
-      </p:sp>
-      <p:sp>
-        <p:nvSpPr>
           <p:cNvPr id="6" name="Footer Placeholder 5"/>
           <p:cNvSpPr>
             <a:spLocks noGrp="1"/>
@@ -6366,7 +5963,11 @@
           <a:p>
             <a:r>
               <a:rPr lang="en-US" dirty="0" smtClean="0"/>
-              <a:t>Case Study - Jana Bettzüge</a:t>
+              <a:t>Case </a:t>
+            </a:r>
+            <a:r>
+              <a:rPr lang="en-US" dirty="0" smtClean="0"/>
+              <a:t>Study</a:t>
             </a:r>
             <a:endParaRPr lang="en-US" dirty="0"/>
           </a:p>
@@ -6754,29 +6355,6 @@
       </p:sp>
       <p:sp>
         <p:nvSpPr>
-          <p:cNvPr id="7" name="Date Placeholder 6"/>
-          <p:cNvSpPr>
-            <a:spLocks noGrp="1"/>
-          </p:cNvSpPr>
-          <p:nvPr>
-            <p:ph type="dt" sz="half" idx="10"/>
-          </p:nvPr>
-        </p:nvSpPr>
-        <p:spPr/>
-        <p:txBody>
-          <a:bodyPr/>
-          <a:lstStyle/>
-          <a:p>
-            <a:r>
-              <a:rPr lang="en-US" smtClean="0"/>
-              <a:t>7/11/2025</a:t>
-            </a:r>
-            <a:endParaRPr lang="en-US" dirty="0"/>
-          </a:p>
-        </p:txBody>
-      </p:sp>
-      <p:sp>
-        <p:nvSpPr>
           <p:cNvPr id="8" name="Footer Placeholder 7"/>
           <p:cNvSpPr>
             <a:spLocks noGrp="1"/>
@@ -6792,7 +6370,11 @@
           <a:p>
             <a:r>
               <a:rPr lang="en-US" dirty="0" smtClean="0"/>
-              <a:t>Case Study - Jana Bettzüge</a:t>
+              <a:t>Case </a:t>
+            </a:r>
+            <a:r>
+              <a:rPr lang="en-US" dirty="0" smtClean="0"/>
+              <a:t>Study</a:t>
             </a:r>
             <a:endParaRPr lang="en-US" dirty="0"/>
           </a:p>
@@ -6876,29 +6458,6 @@
       </p:sp>
       <p:sp>
         <p:nvSpPr>
-          <p:cNvPr id="3" name="Date Placeholder 2"/>
-          <p:cNvSpPr>
-            <a:spLocks noGrp="1"/>
-          </p:cNvSpPr>
-          <p:nvPr>
-            <p:ph type="dt" sz="half" idx="10"/>
-          </p:nvPr>
-        </p:nvSpPr>
-        <p:spPr/>
-        <p:txBody>
-          <a:bodyPr/>
-          <a:lstStyle/>
-          <a:p>
-            <a:r>
-              <a:rPr lang="en-US" smtClean="0"/>
-              <a:t>7/11/2025</a:t>
-            </a:r>
-            <a:endParaRPr lang="en-US" dirty="0"/>
-          </a:p>
-        </p:txBody>
-      </p:sp>
-      <p:sp>
-        <p:nvSpPr>
           <p:cNvPr id="4" name="Footer Placeholder 3"/>
           <p:cNvSpPr>
             <a:spLocks noGrp="1"/>
@@ -6914,7 +6473,11 @@
           <a:p>
             <a:r>
               <a:rPr lang="en-US" dirty="0" smtClean="0"/>
-              <a:t>Case Study - Jana Bettzüge</a:t>
+              <a:t>Case </a:t>
+            </a:r>
+            <a:r>
+              <a:rPr lang="en-US" dirty="0" smtClean="0"/>
+              <a:t>Study</a:t>
             </a:r>
             <a:endParaRPr lang="en-US" dirty="0"/>
           </a:p>
@@ -6975,29 +6538,6 @@
       </p:grpSpPr>
       <p:sp>
         <p:nvSpPr>
-          <p:cNvPr id="2" name="Date Placeholder 1"/>
-          <p:cNvSpPr>
-            <a:spLocks noGrp="1"/>
-          </p:cNvSpPr>
-          <p:nvPr>
-            <p:ph type="dt" sz="half" idx="10"/>
-          </p:nvPr>
-        </p:nvSpPr>
-        <p:spPr/>
-        <p:txBody>
-          <a:bodyPr/>
-          <a:lstStyle/>
-          <a:p>
-            <a:r>
-              <a:rPr lang="en-US" smtClean="0"/>
-              <a:t>7/11/2025</a:t>
-            </a:r>
-            <a:endParaRPr lang="en-US" dirty="0"/>
-          </a:p>
-        </p:txBody>
-      </p:sp>
-      <p:sp>
-        <p:nvSpPr>
           <p:cNvPr id="3" name="Footer Placeholder 2"/>
           <p:cNvSpPr>
             <a:spLocks noGrp="1"/>
@@ -7013,7 +6553,11 @@
           <a:p>
             <a:r>
               <a:rPr lang="en-US" dirty="0" smtClean="0"/>
-              <a:t>Case Study - Jana Bettzüge</a:t>
+              <a:t>Case </a:t>
+            </a:r>
+            <a:r>
+              <a:rPr lang="en-US" dirty="0" smtClean="0"/>
+              <a:t>Study</a:t>
             </a:r>
             <a:endParaRPr lang="en-US" dirty="0"/>
           </a:p>
@@ -7046,544 +6590,6 @@
     <p:extLst>
       <p:ext uri="{BB962C8B-B14F-4D97-AF65-F5344CB8AC3E}">
         <p14:creationId xmlns:p14="http://schemas.microsoft.com/office/powerpoint/2010/main" val="1212999818"/>
-      </p:ext>
-    </p:extLst>
-  </p:cSld>
-  <p:clrMapOvr>
-    <a:masterClrMapping/>
-  </p:clrMapOvr>
-</p:sldLayout>
-</file>
-
-<file path=ppt/slideLayouts/slideLayout8.xml><?xml version="1.0" encoding="utf-8"?>
-<p:sldLayout xmlns:a="http://schemas.openxmlformats.org/drawingml/2006/main" xmlns:r="http://schemas.openxmlformats.org/officeDocument/2006/relationships" xmlns:p="http://schemas.openxmlformats.org/presentationml/2006/main" type="objTx" preserve="1">
-  <p:cSld name="Content with Caption">
-    <p:spTree>
-      <p:nvGrpSpPr>
-        <p:cNvPr id="1" name=""/>
-        <p:cNvGrpSpPr/>
-        <p:nvPr/>
-      </p:nvGrpSpPr>
-      <p:grpSpPr>
-        <a:xfrm>
-          <a:off x="0" y="0"/>
-          <a:ext cx="0" cy="0"/>
-          <a:chOff x="0" y="0"/>
-          <a:chExt cx="0" cy="0"/>
-        </a:xfrm>
-      </p:grpSpPr>
-      <p:sp>
-        <p:nvSpPr>
-          <p:cNvPr id="2" name="Title 1"/>
-          <p:cNvSpPr>
-            <a:spLocks noGrp="1"/>
-          </p:cNvSpPr>
-          <p:nvPr>
-            <p:ph type="title"/>
-          </p:nvPr>
-        </p:nvSpPr>
-        <p:spPr>
-          <a:xfrm>
-            <a:off x="609601" y="273050"/>
-            <a:ext cx="4011084" cy="1162050"/>
-          </a:xfrm>
-        </p:spPr>
-        <p:txBody>
-          <a:bodyPr anchor="b"/>
-          <a:lstStyle>
-            <a:lvl1pPr algn="l">
-              <a:defRPr sz="2000" b="1"/>
-            </a:lvl1pPr>
-          </a:lstStyle>
-          <a:p>
-            <a:r>
-              <a:rPr lang="en-US" smtClean="0"/>
-              <a:t>Click to edit Master title style</a:t>
-            </a:r>
-            <a:endParaRPr lang="en-US"/>
-          </a:p>
-        </p:txBody>
-      </p:sp>
-      <p:sp>
-        <p:nvSpPr>
-          <p:cNvPr id="3" name="Content Placeholder 2"/>
-          <p:cNvSpPr>
-            <a:spLocks noGrp="1"/>
-          </p:cNvSpPr>
-          <p:nvPr>
-            <p:ph idx="1"/>
-          </p:nvPr>
-        </p:nvSpPr>
-        <p:spPr>
-          <a:xfrm>
-            <a:off x="4766733" y="273051"/>
-            <a:ext cx="6815667" cy="5853113"/>
-          </a:xfrm>
-        </p:spPr>
-        <p:txBody>
-          <a:bodyPr/>
-          <a:lstStyle>
-            <a:lvl1pPr>
-              <a:defRPr sz="3200"/>
-            </a:lvl1pPr>
-            <a:lvl2pPr>
-              <a:defRPr sz="2800"/>
-            </a:lvl2pPr>
-            <a:lvl3pPr>
-              <a:defRPr sz="2400"/>
-            </a:lvl3pPr>
-            <a:lvl4pPr>
-              <a:defRPr sz="2000"/>
-            </a:lvl4pPr>
-            <a:lvl5pPr>
-              <a:defRPr sz="2000"/>
-            </a:lvl5pPr>
-            <a:lvl6pPr>
-              <a:defRPr sz="2000"/>
-            </a:lvl6pPr>
-            <a:lvl7pPr>
-              <a:defRPr sz="2000"/>
-            </a:lvl7pPr>
-            <a:lvl8pPr>
-              <a:defRPr sz="2000"/>
-            </a:lvl8pPr>
-            <a:lvl9pPr>
-              <a:defRPr sz="2000"/>
-            </a:lvl9pPr>
-          </a:lstStyle>
-          <a:p>
-            <a:pPr lvl="0"/>
-            <a:r>
-              <a:rPr lang="en-US" smtClean="0"/>
-              <a:t>Click to edit Master text styles</a:t>
-            </a:r>
-          </a:p>
-          <a:p>
-            <a:pPr lvl="1"/>
-            <a:r>
-              <a:rPr lang="en-US" smtClean="0"/>
-              <a:t>Second level</a:t>
-            </a:r>
-          </a:p>
-          <a:p>
-            <a:pPr lvl="2"/>
-            <a:r>
-              <a:rPr lang="en-US" smtClean="0"/>
-              <a:t>Third level</a:t>
-            </a:r>
-          </a:p>
-          <a:p>
-            <a:pPr lvl="3"/>
-            <a:r>
-              <a:rPr lang="en-US" smtClean="0"/>
-              <a:t>Fourth level</a:t>
-            </a:r>
-          </a:p>
-          <a:p>
-            <a:pPr lvl="4"/>
-            <a:r>
-              <a:rPr lang="en-US" smtClean="0"/>
-              <a:t>Fifth level</a:t>
-            </a:r>
-            <a:endParaRPr lang="en-US"/>
-          </a:p>
-        </p:txBody>
-      </p:sp>
-      <p:sp>
-        <p:nvSpPr>
-          <p:cNvPr id="4" name="Text Placeholder 3"/>
-          <p:cNvSpPr>
-            <a:spLocks noGrp="1"/>
-          </p:cNvSpPr>
-          <p:nvPr>
-            <p:ph type="body" sz="half" idx="2"/>
-          </p:nvPr>
-        </p:nvSpPr>
-        <p:spPr>
-          <a:xfrm>
-            <a:off x="609601" y="1435101"/>
-            <a:ext cx="4011084" cy="4691063"/>
-          </a:xfrm>
-        </p:spPr>
-        <p:txBody>
-          <a:bodyPr/>
-          <a:lstStyle>
-            <a:lvl1pPr marL="0" indent="0">
-              <a:buNone/>
-              <a:defRPr sz="1400"/>
-            </a:lvl1pPr>
-            <a:lvl2pPr marL="457200" indent="0">
-              <a:buNone/>
-              <a:defRPr sz="1200"/>
-            </a:lvl2pPr>
-            <a:lvl3pPr marL="914400" indent="0">
-              <a:buNone/>
-              <a:defRPr sz="1000"/>
-            </a:lvl3pPr>
-            <a:lvl4pPr marL="1371600" indent="0">
-              <a:buNone/>
-              <a:defRPr sz="900"/>
-            </a:lvl4pPr>
-            <a:lvl5pPr marL="1828800" indent="0">
-              <a:buNone/>
-              <a:defRPr sz="900"/>
-            </a:lvl5pPr>
-            <a:lvl6pPr marL="2286000" indent="0">
-              <a:buNone/>
-              <a:defRPr sz="900"/>
-            </a:lvl6pPr>
-            <a:lvl7pPr marL="2743200" indent="0">
-              <a:buNone/>
-              <a:defRPr sz="900"/>
-            </a:lvl7pPr>
-            <a:lvl8pPr marL="3200400" indent="0">
-              <a:buNone/>
-              <a:defRPr sz="900"/>
-            </a:lvl8pPr>
-            <a:lvl9pPr marL="3657600" indent="0">
-              <a:buNone/>
-              <a:defRPr sz="900"/>
-            </a:lvl9pPr>
-          </a:lstStyle>
-          <a:p>
-            <a:pPr lvl="0"/>
-            <a:r>
-              <a:rPr lang="en-US" smtClean="0"/>
-              <a:t>Click to edit Master text styles</a:t>
-            </a:r>
-          </a:p>
-        </p:txBody>
-      </p:sp>
-      <p:sp>
-        <p:nvSpPr>
-          <p:cNvPr id="5" name="Date Placeholder 4"/>
-          <p:cNvSpPr>
-            <a:spLocks noGrp="1"/>
-          </p:cNvSpPr>
-          <p:nvPr>
-            <p:ph type="dt" sz="half" idx="10"/>
-          </p:nvPr>
-        </p:nvSpPr>
-        <p:spPr/>
-        <p:txBody>
-          <a:bodyPr/>
-          <a:lstStyle/>
-          <a:p>
-            <a:r>
-              <a:rPr lang="en-US" smtClean="0"/>
-              <a:t>7/11/2025</a:t>
-            </a:r>
-            <a:endParaRPr lang="en-US" dirty="0"/>
-          </a:p>
-        </p:txBody>
-      </p:sp>
-      <p:sp>
-        <p:nvSpPr>
-          <p:cNvPr id="6" name="Footer Placeholder 5"/>
-          <p:cNvSpPr>
-            <a:spLocks noGrp="1"/>
-          </p:cNvSpPr>
-          <p:nvPr>
-            <p:ph type="ftr" sz="quarter" idx="11"/>
-          </p:nvPr>
-        </p:nvSpPr>
-        <p:spPr/>
-        <p:txBody>
-          <a:bodyPr/>
-          <a:lstStyle/>
-          <a:p>
-            <a:r>
-              <a:rPr lang="en-US" dirty="0" smtClean="0"/>
-              <a:t>Case Study - Jana Bettzüge</a:t>
-            </a:r>
-            <a:endParaRPr lang="en-US" dirty="0"/>
-          </a:p>
-        </p:txBody>
-      </p:sp>
-      <p:sp>
-        <p:nvSpPr>
-          <p:cNvPr id="7" name="Slide Number Placeholder 6"/>
-          <p:cNvSpPr>
-            <a:spLocks noGrp="1"/>
-          </p:cNvSpPr>
-          <p:nvPr>
-            <p:ph type="sldNum" sz="quarter" idx="12"/>
-          </p:nvPr>
-        </p:nvSpPr>
-        <p:spPr/>
-        <p:txBody>
-          <a:bodyPr/>
-          <a:lstStyle/>
-          <a:p>
-            <a:fld id="{C1FF6DA9-008F-8B48-92A6-B652298478BF}" type="slidenum">
-              <a:rPr lang="en-US" smtClean="0"/>
-              <a:t>‹Nr.›</a:t>
-            </a:fld>
-            <a:endParaRPr lang="en-US" dirty="0"/>
-          </a:p>
-        </p:txBody>
-      </p:sp>
-    </p:spTree>
-    <p:extLst>
-      <p:ext uri="{BB962C8B-B14F-4D97-AF65-F5344CB8AC3E}">
-        <p14:creationId xmlns:p14="http://schemas.microsoft.com/office/powerpoint/2010/main" val="1840726560"/>
-      </p:ext>
-    </p:extLst>
-  </p:cSld>
-  <p:clrMapOvr>
-    <a:masterClrMapping/>
-  </p:clrMapOvr>
-</p:sldLayout>
-</file>
-
-<file path=ppt/slideLayouts/slideLayout9.xml><?xml version="1.0" encoding="utf-8"?>
-<p:sldLayout xmlns:a="http://schemas.openxmlformats.org/drawingml/2006/main" xmlns:r="http://schemas.openxmlformats.org/officeDocument/2006/relationships" xmlns:p="http://schemas.openxmlformats.org/presentationml/2006/main" type="picTx" preserve="1">
-  <p:cSld name="Picture with Caption">
-    <p:spTree>
-      <p:nvGrpSpPr>
-        <p:cNvPr id="1" name=""/>
-        <p:cNvGrpSpPr/>
-        <p:nvPr/>
-      </p:nvGrpSpPr>
-      <p:grpSpPr>
-        <a:xfrm>
-          <a:off x="0" y="0"/>
-          <a:ext cx="0" cy="0"/>
-          <a:chOff x="0" y="0"/>
-          <a:chExt cx="0" cy="0"/>
-        </a:xfrm>
-      </p:grpSpPr>
-      <p:sp>
-        <p:nvSpPr>
-          <p:cNvPr id="2" name="Title 1"/>
-          <p:cNvSpPr>
-            <a:spLocks noGrp="1"/>
-          </p:cNvSpPr>
-          <p:nvPr>
-            <p:ph type="title"/>
-          </p:nvPr>
-        </p:nvSpPr>
-        <p:spPr>
-          <a:xfrm>
-            <a:off x="2389717" y="4800600"/>
-            <a:ext cx="7315200" cy="566738"/>
-          </a:xfrm>
-        </p:spPr>
-        <p:txBody>
-          <a:bodyPr anchor="b"/>
-          <a:lstStyle>
-            <a:lvl1pPr algn="l">
-              <a:defRPr sz="2000" b="1"/>
-            </a:lvl1pPr>
-          </a:lstStyle>
-          <a:p>
-            <a:r>
-              <a:rPr lang="en-US" smtClean="0"/>
-              <a:t>Click to edit Master title style</a:t>
-            </a:r>
-            <a:endParaRPr lang="en-US"/>
-          </a:p>
-        </p:txBody>
-      </p:sp>
-      <p:sp>
-        <p:nvSpPr>
-          <p:cNvPr id="3" name="Picture Placeholder 2"/>
-          <p:cNvSpPr>
-            <a:spLocks noGrp="1"/>
-          </p:cNvSpPr>
-          <p:nvPr>
-            <p:ph type="pic" idx="1"/>
-          </p:nvPr>
-        </p:nvSpPr>
-        <p:spPr>
-          <a:xfrm>
-            <a:off x="2389717" y="612775"/>
-            <a:ext cx="7315200" cy="4114800"/>
-          </a:xfrm>
-        </p:spPr>
-        <p:txBody>
-          <a:bodyPr/>
-          <a:lstStyle>
-            <a:lvl1pPr marL="0" indent="0">
-              <a:buNone/>
-              <a:defRPr sz="3200"/>
-            </a:lvl1pPr>
-            <a:lvl2pPr marL="457200" indent="0">
-              <a:buNone/>
-              <a:defRPr sz="2800"/>
-            </a:lvl2pPr>
-            <a:lvl3pPr marL="914400" indent="0">
-              <a:buNone/>
-              <a:defRPr sz="2400"/>
-            </a:lvl3pPr>
-            <a:lvl4pPr marL="1371600" indent="0">
-              <a:buNone/>
-              <a:defRPr sz="2000"/>
-            </a:lvl4pPr>
-            <a:lvl5pPr marL="1828800" indent="0">
-              <a:buNone/>
-              <a:defRPr sz="2000"/>
-            </a:lvl5pPr>
-            <a:lvl6pPr marL="2286000" indent="0">
-              <a:buNone/>
-              <a:defRPr sz="2000"/>
-            </a:lvl6pPr>
-            <a:lvl7pPr marL="2743200" indent="0">
-              <a:buNone/>
-              <a:defRPr sz="2000"/>
-            </a:lvl7pPr>
-            <a:lvl8pPr marL="3200400" indent="0">
-              <a:buNone/>
-              <a:defRPr sz="2000"/>
-            </a:lvl8pPr>
-            <a:lvl9pPr marL="3657600" indent="0">
-              <a:buNone/>
-              <a:defRPr sz="2000"/>
-            </a:lvl9pPr>
-          </a:lstStyle>
-          <a:p>
-            <a:endParaRPr lang="en-US" dirty="0"/>
-          </a:p>
-        </p:txBody>
-      </p:sp>
-      <p:sp>
-        <p:nvSpPr>
-          <p:cNvPr id="4" name="Text Placeholder 3"/>
-          <p:cNvSpPr>
-            <a:spLocks noGrp="1"/>
-          </p:cNvSpPr>
-          <p:nvPr>
-            <p:ph type="body" sz="half" idx="2"/>
-          </p:nvPr>
-        </p:nvSpPr>
-        <p:spPr>
-          <a:xfrm>
-            <a:off x="2389717" y="5367338"/>
-            <a:ext cx="7315200" cy="804862"/>
-          </a:xfrm>
-        </p:spPr>
-        <p:txBody>
-          <a:bodyPr/>
-          <a:lstStyle>
-            <a:lvl1pPr marL="0" indent="0">
-              <a:buNone/>
-              <a:defRPr sz="1400"/>
-            </a:lvl1pPr>
-            <a:lvl2pPr marL="457200" indent="0">
-              <a:buNone/>
-              <a:defRPr sz="1200"/>
-            </a:lvl2pPr>
-            <a:lvl3pPr marL="914400" indent="0">
-              <a:buNone/>
-              <a:defRPr sz="1000"/>
-            </a:lvl3pPr>
-            <a:lvl4pPr marL="1371600" indent="0">
-              <a:buNone/>
-              <a:defRPr sz="900"/>
-            </a:lvl4pPr>
-            <a:lvl5pPr marL="1828800" indent="0">
-              <a:buNone/>
-              <a:defRPr sz="900"/>
-            </a:lvl5pPr>
-            <a:lvl6pPr marL="2286000" indent="0">
-              <a:buNone/>
-              <a:defRPr sz="900"/>
-            </a:lvl6pPr>
-            <a:lvl7pPr marL="2743200" indent="0">
-              <a:buNone/>
-              <a:defRPr sz="900"/>
-            </a:lvl7pPr>
-            <a:lvl8pPr marL="3200400" indent="0">
-              <a:buNone/>
-              <a:defRPr sz="900"/>
-            </a:lvl8pPr>
-            <a:lvl9pPr marL="3657600" indent="0">
-              <a:buNone/>
-              <a:defRPr sz="900"/>
-            </a:lvl9pPr>
-          </a:lstStyle>
-          <a:p>
-            <a:pPr lvl="0"/>
-            <a:r>
-              <a:rPr lang="en-US" smtClean="0"/>
-              <a:t>Click to edit Master text styles</a:t>
-            </a:r>
-          </a:p>
-        </p:txBody>
-      </p:sp>
-      <p:sp>
-        <p:nvSpPr>
-          <p:cNvPr id="5" name="Date Placeholder 4"/>
-          <p:cNvSpPr>
-            <a:spLocks noGrp="1"/>
-          </p:cNvSpPr>
-          <p:nvPr>
-            <p:ph type="dt" sz="half" idx="10"/>
-          </p:nvPr>
-        </p:nvSpPr>
-        <p:spPr/>
-        <p:txBody>
-          <a:bodyPr/>
-          <a:lstStyle/>
-          <a:p>
-            <a:r>
-              <a:rPr lang="en-US" smtClean="0"/>
-              <a:t>7/11/2025</a:t>
-            </a:r>
-            <a:endParaRPr lang="en-US" dirty="0"/>
-          </a:p>
-        </p:txBody>
-      </p:sp>
-      <p:sp>
-        <p:nvSpPr>
-          <p:cNvPr id="6" name="Footer Placeholder 5"/>
-          <p:cNvSpPr>
-            <a:spLocks noGrp="1"/>
-          </p:cNvSpPr>
-          <p:nvPr>
-            <p:ph type="ftr" sz="quarter" idx="11"/>
-          </p:nvPr>
-        </p:nvSpPr>
-        <p:spPr/>
-        <p:txBody>
-          <a:bodyPr/>
-          <a:lstStyle/>
-          <a:p>
-            <a:r>
-              <a:rPr lang="en-US" dirty="0" smtClean="0"/>
-              <a:t>Case Study - Jana Bettzüge</a:t>
-            </a:r>
-            <a:endParaRPr lang="en-US" dirty="0"/>
-          </a:p>
-        </p:txBody>
-      </p:sp>
-      <p:sp>
-        <p:nvSpPr>
-          <p:cNvPr id="7" name="Slide Number Placeholder 6"/>
-          <p:cNvSpPr>
-            <a:spLocks noGrp="1"/>
-          </p:cNvSpPr>
-          <p:nvPr>
-            <p:ph type="sldNum" sz="quarter" idx="12"/>
-          </p:nvPr>
-        </p:nvSpPr>
-        <p:spPr/>
-        <p:txBody>
-          <a:bodyPr/>
-          <a:lstStyle/>
-          <a:p>
-            <a:fld id="{C1FF6DA9-008F-8B48-92A6-B652298478BF}" type="slidenum">
-              <a:rPr lang="en-US" smtClean="0"/>
-              <a:t>‹Nr.›</a:t>
-            </a:fld>
-            <a:endParaRPr lang="en-US" dirty="0"/>
-          </a:p>
-        </p:txBody>
-      </p:sp>
-    </p:spTree>
-    <p:extLst>
-      <p:ext uri="{BB962C8B-B14F-4D97-AF65-F5344CB8AC3E}">
-        <p14:creationId xmlns:p14="http://schemas.microsoft.com/office/powerpoint/2010/main" val="3889236939"/>
       </p:ext>
     </p:extLst>
   </p:cSld>
@@ -7712,49 +6718,6 @@
       </p:sp>
       <p:sp>
         <p:nvSpPr>
-          <p:cNvPr id="4" name="Date Placeholder 3"/>
-          <p:cNvSpPr>
-            <a:spLocks noGrp="1"/>
-          </p:cNvSpPr>
-          <p:nvPr>
-            <p:ph type="dt" sz="half" idx="2"/>
-          </p:nvPr>
-        </p:nvSpPr>
-        <p:spPr>
-          <a:xfrm>
-            <a:off x="302080" y="6356351"/>
-            <a:ext cx="3152320" cy="365125"/>
-          </a:xfrm>
-          <a:prstGeom prst="rect">
-            <a:avLst/>
-          </a:prstGeom>
-        </p:spPr>
-        <p:txBody>
-          <a:bodyPr vert="horz" lIns="91440" tIns="45720" rIns="91440" bIns="45720" rtlCol="0" anchor="ctr"/>
-          <a:lstStyle>
-            <a:lvl1pPr algn="l">
-              <a:defRPr sz="1200">
-                <a:solidFill>
-                  <a:schemeClr val="tx1">
-                    <a:tint val="75000"/>
-                  </a:schemeClr>
-                </a:solidFill>
-                <a:latin typeface="Arial" panose="020B0604020202020204" pitchFamily="34" charset="0"/>
-                <a:cs typeface="Arial" panose="020B0604020202020204" pitchFamily="34" charset="0"/>
-              </a:defRPr>
-            </a:lvl1pPr>
-          </a:lstStyle>
-          <a:p>
-            <a:r>
-              <a:rPr lang="en-US" smtClean="0"/>
-              <a:t>7/11/2025</a:t>
-            </a:r>
-            <a:endParaRPr lang="en-US" dirty="0"/>
-          </a:p>
-        </p:txBody>
-      </p:sp>
-      <p:sp>
-        <p:nvSpPr>
           <p:cNvPr id="5" name="Footer Placeholder 4"/>
           <p:cNvSpPr>
             <a:spLocks noGrp="1"/>
@@ -7790,7 +6753,11 @@
           <a:p>
             <a:r>
               <a:rPr lang="en-US" dirty="0" smtClean="0"/>
-              <a:t>Case Study - Jana Bettzüge</a:t>
+              <a:t>Case </a:t>
+            </a:r>
+            <a:r>
+              <a:rPr lang="en-US" dirty="0" smtClean="0"/>
+              <a:t>Study</a:t>
             </a:r>
             <a:endParaRPr lang="en-US" dirty="0"/>
           </a:p>
@@ -7849,7 +6816,7 @@
           <p:nvPr userDrawn="1"/>
         </p:nvPicPr>
         <p:blipFill>
-          <a:blip r:embed="rId13">
+          <a:blip r:embed="rId9">
             <a:extLst>
               <a:ext uri="{28A0092B-C50C-407E-A947-70E740481C1C}">
                 <a14:useLocalDpi xmlns:a14="http://schemas.microsoft.com/office/drawing/2010/main" val="0"/>
@@ -7934,10 +6901,6 @@
     <p:sldLayoutId id="2147483653" r:id="rId5"/>
     <p:sldLayoutId id="2147483654" r:id="rId6"/>
     <p:sldLayoutId id="2147483655" r:id="rId7"/>
-    <p:sldLayoutId id="2147483656" r:id="rId8"/>
-    <p:sldLayoutId id="2147483657" r:id="rId9"/>
-    <p:sldLayoutId id="2147483658" r:id="rId10"/>
-    <p:sldLayoutId id="2147483659" r:id="rId11"/>
   </p:sldLayoutIdLst>
   <p:hf hdr="0"/>
   <p:txStyles>
@@ -8226,7 +7189,16 @@
           <a:lstStyle/>
           <a:p>
             <a:r>
-              <a:t>Senior Data Analyst @[Unternehmen] - Case Study</a:t>
+              <a:rPr dirty="0"/>
+              <a:t>Senior Data Analyst </a:t>
+            </a:r>
+            <a:r>
+              <a:rPr dirty="0" smtClean="0"/>
+              <a:t>- </a:t>
+            </a:r>
+            <a:r>
+              <a:rPr dirty="0"/>
+              <a:t>Case Study</a:t>
             </a:r>
           </a:p>
         </p:txBody>
@@ -8247,13 +7219,28 @@
           <a:lstStyle/>
           <a:p>
             <a:r>
+              <a:rPr dirty="0"/>
               <a:t>Presented by</a:t>
             </a:r>
           </a:p>
           <a:p>
             <a:r>
-              <a:t>Senior Data Analyst (anonymisiert)</a:t>
-            </a:r>
+              <a:rPr dirty="0"/>
+              <a:t>Senior Data Analyst </a:t>
+            </a:r>
+            <a:r>
+              <a:rPr dirty="0" smtClean="0"/>
+              <a:t>(</a:t>
+            </a:r>
+            <a:r>
+              <a:rPr lang="de-DE" dirty="0" smtClean="0"/>
+              <a:t>Jana Bettzüge</a:t>
+            </a:r>
+            <a:r>
+              <a:rPr dirty="0" smtClean="0"/>
+              <a:t>)</a:t>
+            </a:r>
+            <a:endParaRPr dirty="0"/>
           </a:p>
         </p:txBody>
       </p:sp>
@@ -8422,19 +7409,8 @@
                 <a:latin typeface="Arial" panose="020B0604020202020204" pitchFamily="34" charset="0"/>
                 <a:cs typeface="Arial" panose="020B0604020202020204" pitchFamily="34" charset="0"/>
               </a:rPr>
-              <a:t>Central (company wide) definition of metrics and data </a:t>
-            </a:r>
-            <a:r>
-              <a:rPr lang="en-US" dirty="0" smtClean="0">
-                <a:latin typeface="Arial" panose="020B0604020202020204" pitchFamily="34" charset="0"/>
-                <a:cs typeface="Arial" panose="020B0604020202020204" pitchFamily="34" charset="0"/>
-              </a:rPr>
-              <a:t>logic</a:t>
-            </a:r>
-            <a:endParaRPr lang="en-US" dirty="0" smtClean="0">
-              <a:latin typeface="Arial" panose="020B0604020202020204" pitchFamily="34" charset="0"/>
-              <a:cs typeface="Arial" panose="020B0604020202020204" pitchFamily="34" charset="0"/>
-            </a:endParaRPr>
+              <a:t>Central (company wide) definition of metrics and data logic</a:t>
+            </a:r>
           </a:p>
           <a:p>
             <a:pPr marL="0" indent="0">
@@ -8550,29 +7526,14 @@
           <a:lstStyle/>
           <a:p>
             <a:r>
-              <a:t>Case Study - Senior Data Analyst (anonymisiert)</a:t>
-            </a:r>
-          </a:p>
-        </p:txBody>
-      </p:sp>
-      <p:sp>
-        <p:nvSpPr>
-          <p:cNvPr id="9" name="Datumsplatzhalter 8"/>
-          <p:cNvSpPr>
-            <a:spLocks noGrp="1"/>
-          </p:cNvSpPr>
-          <p:nvPr>
-            <p:ph type="dt" sz="half" idx="10"/>
-          </p:nvPr>
-        </p:nvSpPr>
-        <p:spPr/>
-        <p:txBody>
-          <a:bodyPr/>
-          <a:lstStyle/>
-          <a:p>
-            <a:r>
-              <a:t>[Datum entfernt]</a:t>
-            </a:r>
+              <a:rPr dirty="0"/>
+              <a:t>Case Study </a:t>
+            </a:r>
+            <a:r>
+              <a:rPr lang="de-DE" dirty="0" smtClean="0"/>
+              <a:t>- Senior Data Analyst</a:t>
+            </a:r>
+            <a:endParaRPr dirty="0"/>
           </a:p>
         </p:txBody>
       </p:sp>
@@ -8669,38 +7630,62 @@
           <a:lstStyle/>
           <a:p>
             <a:r>
+              <a:rPr dirty="0"/>
               <a:t>Tell us about a past project you’re genuinely proud of. Ideally one where:</a:t>
             </a:r>
           </a:p>
           <a:p>
             <a:r>
+              <a:rPr dirty="0"/>
               <a:t>You made a measurable impact with data</a:t>
             </a:r>
           </a:p>
           <a:p>
             <a:r>
+              <a:rPr dirty="0"/>
               <a:t>The work was messy or ambiguous</a:t>
             </a:r>
           </a:p>
           <a:p>
             <a:r>
+              <a:rPr dirty="0"/>
               <a:t>You had to collaborate with skeptical or non-technical stakeholders</a:t>
             </a:r>
           </a:p>
           <a:p>
             <a:r>
+              <a:rPr dirty="0"/>
               <a:t>And now, looking back:</a:t>
             </a:r>
           </a:p>
           <a:p>
             <a:r>
+              <a:rPr dirty="0"/>
               <a:t>Would you do anything differently?</a:t>
             </a:r>
           </a:p>
           <a:p>
             <a:r>
-              <a:t>What key lessons would you bring to [Unternehmen]?</a:t>
-            </a:r>
+              <a:rPr dirty="0"/>
+              <a:t>What key lessons would you bring to </a:t>
+            </a:r>
+            <a:r>
+              <a:rPr lang="de-DE" dirty="0" err="1" smtClean="0"/>
+              <a:t>the</a:t>
+            </a:r>
+            <a:r>
+              <a:rPr lang="de-DE" dirty="0" smtClean="0"/>
+              <a:t> </a:t>
+            </a:r>
+            <a:r>
+              <a:rPr lang="de-DE" dirty="0" err="1" smtClean="0"/>
+              <a:t>company</a:t>
+            </a:r>
+            <a:r>
+              <a:rPr dirty="0" smtClean="0"/>
+              <a:t>?</a:t>
+            </a:r>
+            <a:endParaRPr dirty="0"/>
           </a:p>
         </p:txBody>
       </p:sp>
@@ -8745,29 +7730,14 @@
           <a:lstStyle/>
           <a:p>
             <a:r>
-              <a:t>Case Study - Senior Data Analyst (anonymisiert)</a:t>
-            </a:r>
-          </a:p>
-        </p:txBody>
-      </p:sp>
-      <p:sp>
-        <p:nvSpPr>
-          <p:cNvPr id="9" name="Datumsplatzhalter 8"/>
-          <p:cNvSpPr>
-            <a:spLocks noGrp="1"/>
-          </p:cNvSpPr>
-          <p:nvPr>
-            <p:ph type="dt" sz="half" idx="10"/>
-          </p:nvPr>
-        </p:nvSpPr>
-        <p:spPr/>
-        <p:txBody>
-          <a:bodyPr/>
-          <a:lstStyle/>
-          <a:p>
-            <a:r>
-              <a:t>[Datum entfernt]</a:t>
-            </a:r>
+              <a:rPr dirty="0"/>
+              <a:t>Case Study </a:t>
+            </a:r>
+            <a:r>
+              <a:rPr lang="de-DE" dirty="0" smtClean="0"/>
+              <a:t>- Senior Data Analyst</a:t>
+            </a:r>
+            <a:endParaRPr dirty="0"/>
           </a:p>
         </p:txBody>
       </p:sp>
@@ -9090,29 +8060,14 @@
           <a:lstStyle/>
           <a:p>
             <a:r>
-              <a:t>Case Study - Senior Data Analyst (anonymisiert)</a:t>
-            </a:r>
-          </a:p>
-        </p:txBody>
-      </p:sp>
-      <p:sp>
-        <p:nvSpPr>
-          <p:cNvPr id="9" name="Datumsplatzhalter 8"/>
-          <p:cNvSpPr>
-            <a:spLocks noGrp="1"/>
-          </p:cNvSpPr>
-          <p:nvPr>
-            <p:ph type="dt" sz="half" idx="10"/>
-          </p:nvPr>
-        </p:nvSpPr>
-        <p:spPr/>
-        <p:txBody>
-          <a:bodyPr/>
-          <a:lstStyle/>
-          <a:p>
-            <a:r>
-              <a:t>[Datum entfernt]</a:t>
-            </a:r>
+              <a:rPr dirty="0"/>
+              <a:t>Case Study </a:t>
+            </a:r>
+            <a:r>
+              <a:rPr lang="de-DE" dirty="0" smtClean="0"/>
+              <a:t>- Senior Data Analyst</a:t>
+            </a:r>
+            <a:endParaRPr dirty="0"/>
           </a:p>
         </p:txBody>
       </p:sp>
@@ -9207,8 +8162,14 @@
           <a:lstStyle/>
           <a:p>
             <a:r>
-              <a:t>Case Study - Senior Data Analyst (anonymisiert)</a:t>
-            </a:r>
+              <a:rPr dirty="0"/>
+              <a:t>Case Study </a:t>
+            </a:r>
+            <a:r>
+              <a:rPr lang="de-DE" dirty="0" smtClean="0"/>
+              <a:t>- Senior Data Analyst</a:t>
+            </a:r>
+            <a:endParaRPr dirty="0"/>
           </a:p>
         </p:txBody>
       </p:sp>
@@ -9273,27 +8234,6 @@
           </a:graphicData>
         </a:graphic>
       </p:graphicFrame>
-      <p:sp>
-        <p:nvSpPr>
-          <p:cNvPr id="14" name="Datumsplatzhalter 13"/>
-          <p:cNvSpPr>
-            <a:spLocks noGrp="1"/>
-          </p:cNvSpPr>
-          <p:nvPr>
-            <p:ph type="dt" sz="half" idx="10"/>
-          </p:nvPr>
-        </p:nvSpPr>
-        <p:spPr/>
-        <p:txBody>
-          <a:bodyPr/>
-          <a:lstStyle/>
-          <a:p>
-            <a:r>
-              <a:t>[Datum entfernt]</a:t>
-            </a:r>
-          </a:p>
-        </p:txBody>
-      </p:sp>
       <p:sp>
         <p:nvSpPr>
           <p:cNvPr id="15" name="Foliennummernplatzhalter 14"/>
@@ -9555,14 +8495,7 @@
                 <a:latin typeface="Arial" panose="020B0604020202020204" pitchFamily="34" charset="0"/>
                 <a:cs typeface="Arial" panose="020B0604020202020204" pitchFamily="34" charset="0"/>
               </a:rPr>
-              <a:t>Cooperative decisions in workshops over theoretical </a:t>
-            </a:r>
-            <a:r>
-              <a:rPr lang="en-US" sz="2600" dirty="0" smtClean="0">
-                <a:latin typeface="Arial" panose="020B0604020202020204" pitchFamily="34" charset="0"/>
-                <a:cs typeface="Arial" panose="020B0604020202020204" pitchFamily="34" charset="0"/>
-              </a:rPr>
-              <a:t>suggestions</a:t>
+              <a:t>Cooperative decisions in workshops over theoretical suggestions</a:t>
             </a:r>
           </a:p>
           <a:p>
@@ -9588,14 +8521,7 @@
                 <a:latin typeface="Arial" panose="020B0604020202020204" pitchFamily="34" charset="0"/>
                 <a:cs typeface="Arial" panose="020B0604020202020204" pitchFamily="34" charset="0"/>
               </a:rPr>
-              <a:t>Empathy</a:t>
-            </a:r>
-            <a:r>
-              <a:rPr lang="en-US" sz="2600" dirty="0" smtClean="0">
-                <a:latin typeface="Arial" panose="020B0604020202020204" pitchFamily="34" charset="0"/>
-                <a:cs typeface="Arial" panose="020B0604020202020204" pitchFamily="34" charset="0"/>
-              </a:rPr>
-              <a:t>, curiosity and service approach when it comes to communication with stakeholders</a:t>
+              <a:t>Empathy, curiosity and service approach when it comes to communication with stakeholders</a:t>
             </a:r>
             <a:endParaRPr lang="en-US" sz="2600" dirty="0">
               <a:latin typeface="Arial" panose="020B0604020202020204" pitchFamily="34" charset="0"/>
@@ -9633,14 +8559,7 @@
                 <a:latin typeface="Arial" panose="020B0604020202020204" pitchFamily="34" charset="0"/>
                 <a:cs typeface="Arial" panose="020B0604020202020204" pitchFamily="34" charset="0"/>
               </a:rPr>
-              <a:t>– </a:t>
-            </a:r>
-            <a:r>
-              <a:rPr lang="en-US" dirty="0" smtClean="0">
-                <a:latin typeface="Arial" panose="020B0604020202020204" pitchFamily="34" charset="0"/>
-                <a:cs typeface="Arial" panose="020B0604020202020204" pitchFamily="34" charset="0"/>
-              </a:rPr>
-              <a:t>Takeaways</a:t>
+              <a:t>– Takeaways</a:t>
             </a:r>
             <a:endParaRPr lang="en-US" dirty="0">
               <a:latin typeface="Arial" panose="020B0604020202020204" pitchFamily="34" charset="0"/>
@@ -9665,29 +8584,14 @@
           <a:lstStyle/>
           <a:p>
             <a:r>
-              <a:t>Case Study - Senior Data Analyst (anonymisiert)</a:t>
-            </a:r>
-          </a:p>
-        </p:txBody>
-      </p:sp>
-      <p:sp>
-        <p:nvSpPr>
-          <p:cNvPr id="9" name="Datumsplatzhalter 8"/>
-          <p:cNvSpPr>
-            <a:spLocks noGrp="1"/>
-          </p:cNvSpPr>
-          <p:nvPr>
-            <p:ph type="dt" sz="half" idx="10"/>
-          </p:nvPr>
-        </p:nvSpPr>
-        <p:spPr/>
-        <p:txBody>
-          <a:bodyPr/>
-          <a:lstStyle/>
-          <a:p>
-            <a:r>
-              <a:t>[Datum entfernt]</a:t>
-            </a:r>
+              <a:rPr dirty="0"/>
+              <a:t>Case Study </a:t>
+            </a:r>
+            <a:r>
+              <a:rPr lang="de-DE" dirty="0" smtClean="0"/>
+              <a:t>- Senior Data Analyst</a:t>
+            </a:r>
+            <a:endParaRPr dirty="0"/>
           </a:p>
         </p:txBody>
       </p:sp>
@@ -9762,7 +8666,16 @@
           <a:lstStyle/>
           <a:p>
             <a:r>
-              <a:t>Senior Data Analyst @[Unternehmen] - Case Study</a:t>
+              <a:rPr dirty="0"/>
+              <a:t>Senior Data Analyst </a:t>
+            </a:r>
+            <a:r>
+              <a:rPr dirty="0" smtClean="0"/>
+              <a:t>- </a:t>
+            </a:r>
+            <a:r>
+              <a:rPr dirty="0"/>
+              <a:t>Case Study</a:t>
             </a:r>
           </a:p>
         </p:txBody>
@@ -9793,7 +8706,9 @@
               <a:t>Max. 2 hours</a:t>
             </a:r>
           </a:p>
-          <a:p/>
+          <a:p>
+            <a:endParaRPr/>
+          </a:p>
           <a:p>
             <a:r>
               <a:t>Format:</a:t>
@@ -9804,7 +8719,9 @@
               <a:t>Your choice. Slides, structured notes, bullet points, or prose - choose the format that helps you communicate clearly and efficiently.</a:t>
             </a:r>
           </a:p>
-          <a:p/>
+          <a:p>
+            <a:endParaRPr/>
+          </a:p>
           <a:p>
             <a:r>
               <a:t>Purpose: </a:t>
@@ -9815,8 +8732,12 @@
               <a:t>Evaluate your analytical thinking, stakeholder empathy, and experience driving impact with data.</a:t>
             </a:r>
           </a:p>
-          <a:p/>
-          <a:p/>
+          <a:p>
+            <a:endParaRPr/>
+          </a:p>
+          <a:p>
+            <a:endParaRPr/>
+          </a:p>
           <a:p>
             <a:r>
               <a:t>Background:</a:t>
@@ -9842,7 +8763,9 @@
               <a:t>Until now, they’ve relied on unstructured Excel reports, fragmented CRM entries, and anecdotal win/loss insights.</a:t>
             </a:r>
           </a:p>
-          <a:p/>
+          <a:p>
+            <a:endParaRPr/>
+          </a:p>
         </p:txBody>
       </p:sp>
       <p:sp>
@@ -9861,29 +8784,14 @@
           <a:lstStyle/>
           <a:p>
             <a:r>
-              <a:t>Case Study - Senior Data Analyst (anonymisiert)</a:t>
-            </a:r>
-          </a:p>
-        </p:txBody>
-      </p:sp>
-      <p:sp>
-        <p:nvSpPr>
-          <p:cNvPr id="9" name="Datumsplatzhalter 8"/>
-          <p:cNvSpPr>
-            <a:spLocks noGrp="1"/>
-          </p:cNvSpPr>
-          <p:nvPr>
-            <p:ph type="dt" sz="half" idx="10"/>
-          </p:nvPr>
-        </p:nvSpPr>
-        <p:spPr/>
-        <p:txBody>
-          <a:bodyPr/>
-          <a:lstStyle/>
-          <a:p>
-            <a:r>
-              <a:t>[Datum entfernt]</a:t>
-            </a:r>
+              <a:rPr dirty="0"/>
+              <a:t>Case Study - Senior Data </a:t>
+            </a:r>
+            <a:r>
+              <a:rPr dirty="0" smtClean="0"/>
+              <a:t>Analyst</a:t>
+            </a:r>
+            <a:endParaRPr dirty="0"/>
           </a:p>
         </p:txBody>
       </p:sp>
@@ -9981,37 +8889,70 @@
           <a:lstStyle/>
           <a:p>
             <a:r>
-              <a:t>You’ve just joined [Unternehmen] as a Senior Data Analyst. The Sales team (focused on B2B food companies) has limited reporting, mostly Excel and CRM exports. The Head of Sales says: “We need to become data-driven. Right now, I don’t trust the numbers, and I don’t know what to focus on.”</a:t>
-            </a:r>
-          </a:p>
-          <a:p/>
-          <a:p>
-            <a:r>
+              <a:rPr dirty="0"/>
+              <a:t>You’ve just joined </a:t>
+            </a:r>
+            <a:r>
+              <a:rPr lang="de-DE" dirty="0" err="1" smtClean="0"/>
+              <a:t>the</a:t>
+            </a:r>
+            <a:r>
+              <a:rPr lang="de-DE" dirty="0" smtClean="0"/>
+              <a:t> </a:t>
+            </a:r>
+            <a:r>
+              <a:rPr lang="de-DE" dirty="0" err="1" smtClean="0"/>
+              <a:t>company</a:t>
+            </a:r>
+            <a:r>
+              <a:rPr lang="de-DE" dirty="0" smtClean="0"/>
+              <a:t> </a:t>
+            </a:r>
+            <a:r>
+              <a:rPr dirty="0" smtClean="0"/>
+              <a:t>as </a:t>
+            </a:r>
+            <a:r>
+              <a:rPr dirty="0"/>
+              <a:t>a Senior Data Analyst. The Sales team (focused on B2B food companies) has limited reporting, mostly Excel and CRM exports. The Head of Sales says: “We need to become data-driven. Right now, I don’t trust the numbers, and I don’t know what to focus on.”</a:t>
+            </a:r>
+          </a:p>
+          <a:p>
+            <a:endParaRPr dirty="0"/>
+          </a:p>
+          <a:p>
+            <a:r>
+              <a:rPr dirty="0"/>
               <a:t>Your task:</a:t>
             </a:r>
           </a:p>
           <a:p>
             <a:r>
+              <a:rPr dirty="0"/>
               <a:t>Outline how you’d approach enabling the Sales team with actionable, trustworthy insights.</a:t>
             </a:r>
           </a:p>
           <a:p>
             <a:r>
+              <a:rPr dirty="0"/>
               <a:t>We’re especially interested in:</a:t>
             </a:r>
           </a:p>
           <a:p>
             <a:r>
+              <a:rPr dirty="0"/>
               <a:t>What would be your first few steps?</a:t>
             </a:r>
           </a:p>
           <a:p>
             <a:r>
+              <a:rPr dirty="0"/>
               <a:t>How would you win trust and adoption?</a:t>
             </a:r>
           </a:p>
           <a:p>
             <a:r>
+              <a:rPr dirty="0"/>
               <a:t>Any hard-earned lessons from similar past work?</a:t>
             </a:r>
           </a:p>
@@ -10033,8 +8974,14 @@
           <a:lstStyle/>
           <a:p>
             <a:r>
-              <a:t>Case Study - Senior Data Analyst (anonymisiert)</a:t>
-            </a:r>
+              <a:rPr dirty="0"/>
+              <a:t>Case Study </a:t>
+            </a:r>
+            <a:r>
+              <a:rPr lang="de-DE" dirty="0" smtClean="0"/>
+              <a:t>- Senior Data Analyst</a:t>
+            </a:r>
+            <a:endParaRPr dirty="0"/>
           </a:p>
         </p:txBody>
       </p:sp>
@@ -10060,27 +9007,6 @@
               <a:t>task</a:t>
             </a:r>
             <a:endParaRPr lang="en-US" dirty="0"/>
-          </a:p>
-        </p:txBody>
-      </p:sp>
-      <p:sp>
-        <p:nvSpPr>
-          <p:cNvPr id="9" name="Datumsplatzhalter 8"/>
-          <p:cNvSpPr>
-            <a:spLocks noGrp="1"/>
-          </p:cNvSpPr>
-          <p:nvPr>
-            <p:ph type="dt" sz="half" idx="10"/>
-          </p:nvPr>
-        </p:nvSpPr>
-        <p:spPr/>
-        <p:txBody>
-          <a:bodyPr/>
-          <a:lstStyle/>
-          <a:p>
-            <a:r>
-              <a:t>[Datum entfernt]</a:t>
-            </a:r>
           </a:p>
         </p:txBody>
       </p:sp>
@@ -10228,8 +9154,14 @@
           <a:lstStyle/>
           <a:p>
             <a:r>
-              <a:t>Case Study - Senior Data Analyst (anonymisiert)</a:t>
-            </a:r>
+              <a:rPr dirty="0"/>
+              <a:t>Case Study </a:t>
+            </a:r>
+            <a:r>
+              <a:rPr lang="de-DE" dirty="0" smtClean="0"/>
+              <a:t>- Senior Data Analyst</a:t>
+            </a:r>
+            <a:endParaRPr dirty="0"/>
           </a:p>
         </p:txBody>
       </p:sp>
@@ -10421,14 +9353,7 @@
                 <a:latin typeface="Arial" panose="020B0604020202020204" pitchFamily="34" charset="0"/>
                 <a:cs typeface="Arial" panose="020B0604020202020204" pitchFamily="34" charset="0"/>
               </a:rPr>
-              <a:t> Excel, </a:t>
-            </a:r>
-            <a:r>
-              <a:rPr lang="de-DE" sz="1400" kern="1200" dirty="0" smtClean="0">
-                <a:latin typeface="Arial" panose="020B0604020202020204" pitchFamily="34" charset="0"/>
-                <a:cs typeface="Arial" panose="020B0604020202020204" pitchFamily="34" charset="0"/>
-              </a:rPr>
-              <a:t>C</a:t>
+              <a:t> Excel, C</a:t>
             </a:r>
             <a:r>
               <a:rPr lang="en-US" sz="1400" kern="1200" dirty="0" smtClean="0">
@@ -11006,17 +9931,7 @@
                 <a:latin typeface="Arial" panose="020B0604020202020204" pitchFamily="34" charset="0"/>
                 <a:cs typeface="Arial" panose="020B0604020202020204" pitchFamily="34" charset="0"/>
               </a:rPr>
-              <a:t>. </a:t>
-            </a:r>
-            <a:r>
-              <a:rPr lang="en-US" sz="1400" dirty="0" smtClean="0">
-                <a:solidFill>
-                  <a:schemeClr val="tx1"/>
-                </a:solidFill>
-                <a:latin typeface="Arial" panose="020B0604020202020204" pitchFamily="34" charset="0"/>
-                <a:cs typeface="Arial" panose="020B0604020202020204" pitchFamily="34" charset="0"/>
-              </a:rPr>
-              <a:t>Right now, I don’t trust the numbers, and I don’t know what to focus on.</a:t>
+              <a:t>. Right now, I don’t trust the numbers, and I don’t know what to focus on.</a:t>
             </a:r>
             <a:r>
               <a:rPr lang="de-DE" sz="1400" dirty="0" smtClean="0">
@@ -11035,27 +9950,6 @@
               <a:latin typeface="Arial" panose="020B0604020202020204" pitchFamily="34" charset="0"/>
               <a:cs typeface="Arial" panose="020B0604020202020204" pitchFamily="34" charset="0"/>
             </a:endParaRPr>
-          </a:p>
-        </p:txBody>
-      </p:sp>
-      <p:sp>
-        <p:nvSpPr>
-          <p:cNvPr id="4" name="Datumsplatzhalter 3"/>
-          <p:cNvSpPr>
-            <a:spLocks noGrp="1"/>
-          </p:cNvSpPr>
-          <p:nvPr>
-            <p:ph type="dt" sz="half" idx="10"/>
-          </p:nvPr>
-        </p:nvSpPr>
-        <p:spPr/>
-        <p:txBody>
-          <a:bodyPr/>
-          <a:lstStyle/>
-          <a:p>
-            <a:r>
-              <a:t>[Datum entfernt]</a:t>
-            </a:r>
           </a:p>
         </p:txBody>
       </p:sp>
@@ -11132,33 +10026,8 @@
                 <a:latin typeface="Arial" panose="020B0604020202020204" pitchFamily="34" charset="0"/>
                 <a:cs typeface="Arial" panose="020B0604020202020204" pitchFamily="34" charset="0"/>
               </a:rPr>
-              <a:t>📊 Part 1: Making </a:t>
-            </a:r>
-            <a:r>
-              <a:rPr lang="de-DE" dirty="0">
-                <a:latin typeface="Arial" panose="020B0604020202020204" pitchFamily="34" charset="0"/>
-                <a:cs typeface="Arial" panose="020B0604020202020204" pitchFamily="34" charset="0"/>
-              </a:rPr>
-              <a:t>Sales</a:t>
-            </a:r>
-            <a:r>
-              <a:rPr lang="de-DE" dirty="0">
-                <a:latin typeface="Arial" panose="020B0604020202020204" pitchFamily="34" charset="0"/>
-                <a:cs typeface="Arial" panose="020B0604020202020204" pitchFamily="34" charset="0"/>
-              </a:rPr>
-              <a:t> Data-</a:t>
-            </a:r>
-            <a:r>
-              <a:rPr lang="de-DE" dirty="0">
-                <a:latin typeface="Arial" panose="020B0604020202020204" pitchFamily="34" charset="0"/>
-                <a:cs typeface="Arial" panose="020B0604020202020204" pitchFamily="34" charset="0"/>
-              </a:rPr>
-              <a:t>Driven</a:t>
-            </a:r>
-            <a:endParaRPr lang="de-DE" dirty="0">
-              <a:latin typeface="Arial" panose="020B0604020202020204" pitchFamily="34" charset="0"/>
-              <a:cs typeface="Arial" panose="020B0604020202020204" pitchFamily="34" charset="0"/>
-            </a:endParaRPr>
+              <a:t>📊 Part 1: Making Sales Data-Driven</a:t>
+            </a:r>
           </a:p>
         </p:txBody>
       </p:sp>
@@ -11184,42 +10053,7 @@
                 <a:latin typeface="Arial" panose="020B0604020202020204" pitchFamily="34" charset="0"/>
                 <a:cs typeface="Arial" panose="020B0604020202020204" pitchFamily="34" charset="0"/>
               </a:rPr>
-              <a:t>Steps</a:t>
-            </a:r>
-            <a:r>
-              <a:rPr lang="de-DE" dirty="0" smtClean="0">
-                <a:latin typeface="Arial" panose="020B0604020202020204" pitchFamily="34" charset="0"/>
-                <a:cs typeface="Arial" panose="020B0604020202020204" pitchFamily="34" charset="0"/>
-              </a:rPr>
-              <a:t> </a:t>
-            </a:r>
-            <a:r>
-              <a:rPr lang="de-DE" dirty="0" smtClean="0">
-                <a:latin typeface="Arial" panose="020B0604020202020204" pitchFamily="34" charset="0"/>
-                <a:cs typeface="Arial" panose="020B0604020202020204" pitchFamily="34" charset="0"/>
-              </a:rPr>
-              <a:t>to</a:t>
-            </a:r>
-            <a:r>
-              <a:rPr lang="de-DE" dirty="0" smtClean="0">
-                <a:latin typeface="Arial" panose="020B0604020202020204" pitchFamily="34" charset="0"/>
-                <a:cs typeface="Arial" panose="020B0604020202020204" pitchFamily="34" charset="0"/>
-              </a:rPr>
-              <a:t> </a:t>
-            </a:r>
-            <a:r>
-              <a:rPr lang="de-DE" dirty="0" smtClean="0">
-                <a:latin typeface="Arial" panose="020B0604020202020204" pitchFamily="34" charset="0"/>
-                <a:cs typeface="Arial" panose="020B0604020202020204" pitchFamily="34" charset="0"/>
-              </a:rPr>
-              <a:t>become</a:t>
-            </a:r>
-            <a:r>
-              <a:rPr lang="de-DE" dirty="0" smtClean="0">
-                <a:latin typeface="Arial" panose="020B0604020202020204" pitchFamily="34" charset="0"/>
-                <a:cs typeface="Arial" panose="020B0604020202020204" pitchFamily="34" charset="0"/>
-              </a:rPr>
-              <a:t> </a:t>
+              <a:t>Steps to become </a:t>
             </a:r>
             <a:r>
               <a:rPr lang="de-DE" dirty="0" smtClean="0"/>
@@ -12109,29 +10943,14 @@
           <a:lstStyle/>
           <a:p>
             <a:r>
-              <a:t>Case Study - Senior Data Analyst (anonymisiert)</a:t>
-            </a:r>
-          </a:p>
-        </p:txBody>
-      </p:sp>
-      <p:sp>
-        <p:nvSpPr>
-          <p:cNvPr id="6" name="Datumsplatzhalter 5"/>
-          <p:cNvSpPr>
-            <a:spLocks noGrp="1"/>
-          </p:cNvSpPr>
-          <p:nvPr>
-            <p:ph type="dt" sz="half" idx="10"/>
-          </p:nvPr>
-        </p:nvSpPr>
-        <p:spPr/>
-        <p:txBody>
-          <a:bodyPr/>
-          <a:lstStyle/>
-          <a:p>
-            <a:r>
-              <a:t>[Datum entfernt]</a:t>
-            </a:r>
+              <a:rPr dirty="0"/>
+              <a:t>Case Study </a:t>
+            </a:r>
+            <a:r>
+              <a:rPr lang="de-DE" dirty="0" smtClean="0"/>
+              <a:t>- Senior Data Analyst</a:t>
+            </a:r>
+            <a:endParaRPr dirty="0"/>
           </a:p>
         </p:txBody>
       </p:sp>
@@ -12451,29 +11270,14 @@
           <a:lstStyle/>
           <a:p>
             <a:r>
-              <a:t>Case Study - Senior Data Analyst (anonymisiert)</a:t>
-            </a:r>
-          </a:p>
-        </p:txBody>
-      </p:sp>
-      <p:sp>
-        <p:nvSpPr>
-          <p:cNvPr id="9" name="Datumsplatzhalter 8"/>
-          <p:cNvSpPr>
-            <a:spLocks noGrp="1"/>
-          </p:cNvSpPr>
-          <p:nvPr>
-            <p:ph type="dt" sz="half" idx="10"/>
-          </p:nvPr>
-        </p:nvSpPr>
-        <p:spPr/>
-        <p:txBody>
-          <a:bodyPr/>
-          <a:lstStyle/>
-          <a:p>
-            <a:r>
-              <a:t>[Datum entfernt]</a:t>
-            </a:r>
+              <a:rPr dirty="0"/>
+              <a:t>Case Study </a:t>
+            </a:r>
+            <a:r>
+              <a:rPr lang="de-DE" dirty="0" smtClean="0"/>
+              <a:t>- Senior Data Analyst</a:t>
+            </a:r>
+            <a:endParaRPr dirty="0"/>
           </a:p>
         </p:txBody>
       </p:sp>
@@ -12703,29 +11507,14 @@
           <a:lstStyle/>
           <a:p>
             <a:r>
-              <a:t>Case Study - Senior Data Analyst (anonymisiert)</a:t>
-            </a:r>
-          </a:p>
-        </p:txBody>
-      </p:sp>
-      <p:sp>
-        <p:nvSpPr>
-          <p:cNvPr id="9" name="Datumsplatzhalter 8"/>
-          <p:cNvSpPr>
-            <a:spLocks noGrp="1"/>
-          </p:cNvSpPr>
-          <p:nvPr>
-            <p:ph type="dt" sz="half" idx="10"/>
-          </p:nvPr>
-        </p:nvSpPr>
-        <p:spPr/>
-        <p:txBody>
-          <a:bodyPr/>
-          <a:lstStyle/>
-          <a:p>
-            <a:r>
-              <a:t>[Datum entfernt]</a:t>
-            </a:r>
+              <a:rPr dirty="0"/>
+              <a:t>Case Study </a:t>
+            </a:r>
+            <a:r>
+              <a:rPr lang="de-DE" dirty="0" smtClean="0"/>
+              <a:t>- Senior Data Analyst</a:t>
+            </a:r>
+            <a:endParaRPr dirty="0"/>
           </a:p>
         </p:txBody>
       </p:sp>
@@ -13049,29 +11838,14 @@
           <a:lstStyle/>
           <a:p>
             <a:r>
-              <a:t>Case Study - Senior Data Analyst (anonymisiert)</a:t>
-            </a:r>
-          </a:p>
-        </p:txBody>
-      </p:sp>
-      <p:sp>
-        <p:nvSpPr>
-          <p:cNvPr id="9" name="Datumsplatzhalter 8"/>
-          <p:cNvSpPr>
-            <a:spLocks noGrp="1"/>
-          </p:cNvSpPr>
-          <p:nvPr>
-            <p:ph type="dt" sz="half" idx="10"/>
-          </p:nvPr>
-        </p:nvSpPr>
-        <p:spPr/>
-        <p:txBody>
-          <a:bodyPr/>
-          <a:lstStyle/>
-          <a:p>
-            <a:r>
-              <a:t>[Datum entfernt]</a:t>
-            </a:r>
+              <a:rPr dirty="0"/>
+              <a:t>Case Study </a:t>
+            </a:r>
+            <a:r>
+              <a:rPr lang="de-DE" dirty="0" smtClean="0"/>
+              <a:t>- Senior Data Analyst</a:t>
+            </a:r>
+            <a:endParaRPr dirty="0"/>
           </a:p>
         </p:txBody>
       </p:sp>
@@ -13280,29 +12054,14 @@
           <a:lstStyle/>
           <a:p>
             <a:r>
-              <a:t>Case Study - Senior Data Analyst (anonymisiert)</a:t>
-            </a:r>
-          </a:p>
-        </p:txBody>
-      </p:sp>
-      <p:sp>
-        <p:nvSpPr>
-          <p:cNvPr id="9" name="Datumsplatzhalter 8"/>
-          <p:cNvSpPr>
-            <a:spLocks noGrp="1"/>
-          </p:cNvSpPr>
-          <p:nvPr>
-            <p:ph type="dt" sz="half" idx="10"/>
-          </p:nvPr>
-        </p:nvSpPr>
-        <p:spPr/>
-        <p:txBody>
-          <a:bodyPr/>
-          <a:lstStyle/>
-          <a:p>
-            <a:r>
-              <a:t>[Datum entfernt]</a:t>
-            </a:r>
+              <a:rPr dirty="0"/>
+              <a:t>Case Study </a:t>
+            </a:r>
+            <a:r>
+              <a:rPr lang="de-DE" dirty="0" smtClean="0"/>
+              <a:t>- Senior Data Analyst</a:t>
+            </a:r>
+            <a:endParaRPr dirty="0"/>
           </a:p>
         </p:txBody>
       </p:sp>
